--- a/PUM1/Wyk/Wyklad0.pptx
+++ b/PUM1/Wyk/Wyklad0.pptx
@@ -5,26 +5,27 @@
     <p:sldMasterId id="2147483696" r:id="rId1"/>
   </p:sldMasterIdLst>
   <p:notesMasterIdLst>
-    <p:notesMasterId r:id="rId16"/>
+    <p:notesMasterId r:id="rId17"/>
   </p:notesMasterIdLst>
   <p:handoutMasterIdLst>
-    <p:handoutMasterId r:id="rId17"/>
+    <p:handoutMasterId r:id="rId18"/>
   </p:handoutMasterIdLst>
   <p:sldIdLst>
     <p:sldId id="346" r:id="rId2"/>
     <p:sldId id="503" r:id="rId3"/>
     <p:sldId id="504" r:id="rId4"/>
-    <p:sldId id="506" r:id="rId5"/>
-    <p:sldId id="508" r:id="rId6"/>
-    <p:sldId id="509" r:id="rId7"/>
-    <p:sldId id="510" r:id="rId8"/>
-    <p:sldId id="515" r:id="rId9"/>
-    <p:sldId id="518" r:id="rId10"/>
-    <p:sldId id="519" r:id="rId11"/>
-    <p:sldId id="520" r:id="rId12"/>
-    <p:sldId id="521" r:id="rId13"/>
-    <p:sldId id="522" r:id="rId14"/>
-    <p:sldId id="523" r:id="rId15"/>
+    <p:sldId id="524" r:id="rId5"/>
+    <p:sldId id="506" r:id="rId6"/>
+    <p:sldId id="508" r:id="rId7"/>
+    <p:sldId id="509" r:id="rId8"/>
+    <p:sldId id="510" r:id="rId9"/>
+    <p:sldId id="515" r:id="rId10"/>
+    <p:sldId id="518" r:id="rId11"/>
+    <p:sldId id="519" r:id="rId12"/>
+    <p:sldId id="520" r:id="rId13"/>
+    <p:sldId id="521" r:id="rId14"/>
+    <p:sldId id="522" r:id="rId15"/>
+    <p:sldId id="523" r:id="rId16"/>
   </p:sldIdLst>
   <p:sldSz cx="9144000" cy="6858000" type="screen4x3"/>
   <p:notesSz cx="6858000" cy="9144000"/>
@@ -285,7 +286,7 @@
           <a:p>
             <a:fld id="{5113504E-0C99-2340-A5F6-DD6E1A87C372}" type="datetimeFigureOut">
               <a:rPr lang="pl-PL" smtClean="0"/>
-              <a:t>26.02.2025</a:t>
+              <a:t>22.02.2026</a:t>
             </a:fld>
             <a:endParaRPr lang="pl-PL"/>
           </a:p>
@@ -451,7 +452,7 @@
           <a:p>
             <a:fld id="{F78C933E-44E9-2D43-91B0-0D2BEEFA7EB9}" type="datetimeFigureOut">
               <a:rPr lang="pl-PL" smtClean="0"/>
-              <a:t>26.02.2025</a:t>
+              <a:t>22.02.2026</a:t>
             </a:fld>
             <a:endParaRPr lang="pl-PL"/>
           </a:p>
@@ -811,6 +812,117 @@
         <p:cNvPr id="1" name="">
           <a:extLst>
             <a:ext uri="{FF2B5EF4-FFF2-40B4-BE49-F238E27FC236}">
+              <a16:creationId xmlns:a16="http://schemas.microsoft.com/office/drawing/2014/main" id="{D09CFF8E-D8D4-0A3A-2952-40E1AE15BA29}"/>
+            </a:ext>
+          </a:extLst>
+        </p:cNvPr>
+        <p:cNvGrpSpPr/>
+        <p:nvPr/>
+      </p:nvGrpSpPr>
+      <p:grpSpPr>
+        <a:xfrm>
+          <a:off x="0" y="0"/>
+          <a:ext cx="0" cy="0"/>
+          <a:chOff x="0" y="0"/>
+          <a:chExt cx="0" cy="0"/>
+        </a:xfrm>
+      </p:grpSpPr>
+      <p:sp>
+        <p:nvSpPr>
+          <p:cNvPr id="2" name="Slide Image Placeholder 1">
+            <a:extLst>
+              <a:ext uri="{FF2B5EF4-FFF2-40B4-BE49-F238E27FC236}">
+                <a16:creationId xmlns:a16="http://schemas.microsoft.com/office/drawing/2014/main" id="{2D1B434F-87BD-3FED-7C94-3A7C47D780B2}"/>
+              </a:ext>
+            </a:extLst>
+          </p:cNvPr>
+          <p:cNvSpPr>
+            <a:spLocks noGrp="1" noRot="1" noChangeAspect="1"/>
+          </p:cNvSpPr>
+          <p:nvPr>
+            <p:ph type="sldImg"/>
+          </p:nvPr>
+        </p:nvSpPr>
+        <p:spPr/>
+      </p:sp>
+      <p:sp>
+        <p:nvSpPr>
+          <p:cNvPr id="3" name="Notes Placeholder 2">
+            <a:extLst>
+              <a:ext uri="{FF2B5EF4-FFF2-40B4-BE49-F238E27FC236}">
+                <a16:creationId xmlns:a16="http://schemas.microsoft.com/office/drawing/2014/main" id="{CFA1E13D-0C08-1997-6BB7-A9C5971B594E}"/>
+              </a:ext>
+            </a:extLst>
+          </p:cNvPr>
+          <p:cNvSpPr>
+            <a:spLocks noGrp="1"/>
+          </p:cNvSpPr>
+          <p:nvPr>
+            <p:ph type="body" idx="1"/>
+          </p:nvPr>
+        </p:nvSpPr>
+        <p:spPr/>
+        <p:txBody>
+          <a:bodyPr/>
+          <a:lstStyle/>
+          <a:p>
+            <a:pPr rtl="0"/>
+            <a:endParaRPr lang="pl-PL" dirty="0">
+              <a:effectLst/>
+            </a:endParaRPr>
+          </a:p>
+        </p:txBody>
+      </p:sp>
+      <p:sp>
+        <p:nvSpPr>
+          <p:cNvPr id="4" name="Slide Number Placeholder 3">
+            <a:extLst>
+              <a:ext uri="{FF2B5EF4-FFF2-40B4-BE49-F238E27FC236}">
+                <a16:creationId xmlns:a16="http://schemas.microsoft.com/office/drawing/2014/main" id="{1CFA25F5-8928-F9B9-F31E-9A797DB529BE}"/>
+              </a:ext>
+            </a:extLst>
+          </p:cNvPr>
+          <p:cNvSpPr>
+            <a:spLocks noGrp="1"/>
+          </p:cNvSpPr>
+          <p:nvPr>
+            <p:ph type="sldNum" sz="quarter" idx="10"/>
+          </p:nvPr>
+        </p:nvSpPr>
+        <p:spPr/>
+        <p:txBody>
+          <a:bodyPr/>
+          <a:lstStyle/>
+          <a:p>
+            <a:fld id="{79CE77F9-1A7F-B148-A0AA-5828300D10BC}" type="slidenum">
+              <a:rPr lang="pl-PL" smtClean="0"/>
+              <a:t>10</a:t>
+            </a:fld>
+            <a:endParaRPr lang="pl-PL"/>
+          </a:p>
+        </p:txBody>
+      </p:sp>
+    </p:spTree>
+    <p:extLst>
+      <p:ext uri="{BB962C8B-B14F-4D97-AF65-F5344CB8AC3E}">
+        <p14:creationId xmlns:p14="http://schemas.microsoft.com/office/powerpoint/2010/main" val="1025112923"/>
+      </p:ext>
+    </p:extLst>
+  </p:cSld>
+  <p:clrMapOvr>
+    <a:masterClrMapping/>
+  </p:clrMapOvr>
+</p:notes>
+</file>
+
+<file path=ppt/notesSlides/notesSlide11.xml><?xml version="1.0" encoding="utf-8"?>
+<p:notes xmlns:a="http://schemas.openxmlformats.org/drawingml/2006/main" xmlns:r="http://schemas.openxmlformats.org/officeDocument/2006/relationships" xmlns:p="http://schemas.openxmlformats.org/presentationml/2006/main">
+  <p:cSld>
+    <p:spTree>
+      <p:nvGrpSpPr>
+        <p:cNvPr id="1" name="">
+          <a:extLst>
+            <a:ext uri="{FF2B5EF4-FFF2-40B4-BE49-F238E27FC236}">
               <a16:creationId xmlns:a16="http://schemas.microsoft.com/office/drawing/2014/main" id="{663D82A2-1BEC-78EF-0D4E-F61753CB3E5D}"/>
             </a:ext>
           </a:extLst>
@@ -895,7 +1007,7 @@
           <a:p>
             <a:fld id="{79CE77F9-1A7F-B148-A0AA-5828300D10BC}" type="slidenum">
               <a:rPr lang="pl-PL" smtClean="0"/>
-              <a:t>10</a:t>
+              <a:t>11</a:t>
             </a:fld>
             <a:endParaRPr lang="pl-PL"/>
           </a:p>
@@ -914,7 +1026,7 @@
 </p:notes>
 </file>
 
-<file path=ppt/notesSlides/notesSlide11.xml><?xml version="1.0" encoding="utf-8"?>
+<file path=ppt/notesSlides/notesSlide12.xml><?xml version="1.0" encoding="utf-8"?>
 <p:notes xmlns:a="http://schemas.openxmlformats.org/drawingml/2006/main" xmlns:r="http://schemas.openxmlformats.org/officeDocument/2006/relationships" xmlns:p="http://schemas.openxmlformats.org/presentationml/2006/main">
   <p:cSld>
     <p:spTree>
@@ -1006,7 +1118,7 @@
           <a:p>
             <a:fld id="{79CE77F9-1A7F-B148-A0AA-5828300D10BC}" type="slidenum">
               <a:rPr lang="pl-PL" smtClean="0"/>
-              <a:t>11</a:t>
+              <a:t>12</a:t>
             </a:fld>
             <a:endParaRPr lang="pl-PL"/>
           </a:p>
@@ -1025,7 +1137,7 @@
 </p:notes>
 </file>
 
-<file path=ppt/notesSlides/notesSlide12.xml><?xml version="1.0" encoding="utf-8"?>
+<file path=ppt/notesSlides/notesSlide13.xml><?xml version="1.0" encoding="utf-8"?>
 <p:notes xmlns:a="http://schemas.openxmlformats.org/drawingml/2006/main" xmlns:r="http://schemas.openxmlformats.org/officeDocument/2006/relationships" xmlns:p="http://schemas.openxmlformats.org/presentationml/2006/main">
   <p:cSld>
     <p:spTree>
@@ -1117,7 +1229,7 @@
           <a:p>
             <a:fld id="{79CE77F9-1A7F-B148-A0AA-5828300D10BC}" type="slidenum">
               <a:rPr lang="pl-PL" smtClean="0"/>
-              <a:t>12</a:t>
+              <a:t>13</a:t>
             </a:fld>
             <a:endParaRPr lang="pl-PL"/>
           </a:p>
@@ -1136,7 +1248,7 @@
 </p:notes>
 </file>
 
-<file path=ppt/notesSlides/notesSlide13.xml><?xml version="1.0" encoding="utf-8"?>
+<file path=ppt/notesSlides/notesSlide14.xml><?xml version="1.0" encoding="utf-8"?>
 <p:notes xmlns:a="http://schemas.openxmlformats.org/drawingml/2006/main" xmlns:r="http://schemas.openxmlformats.org/officeDocument/2006/relationships" xmlns:p="http://schemas.openxmlformats.org/presentationml/2006/main">
   <p:cSld>
     <p:spTree>
@@ -1228,7 +1340,7 @@
           <a:p>
             <a:fld id="{79CE77F9-1A7F-B148-A0AA-5828300D10BC}" type="slidenum">
               <a:rPr lang="pl-PL" smtClean="0"/>
-              <a:t>13</a:t>
+              <a:t>14</a:t>
             </a:fld>
             <a:endParaRPr lang="pl-PL"/>
           </a:p>
@@ -1247,7 +1359,7 @@
 </p:notes>
 </file>
 
-<file path=ppt/notesSlides/notesSlide14.xml><?xml version="1.0" encoding="utf-8"?>
+<file path=ppt/notesSlides/notesSlide15.xml><?xml version="1.0" encoding="utf-8"?>
 <p:notes xmlns:a="http://schemas.openxmlformats.org/drawingml/2006/main" xmlns:r="http://schemas.openxmlformats.org/officeDocument/2006/relationships" xmlns:p="http://schemas.openxmlformats.org/presentationml/2006/main">
   <p:cSld>
     <p:spTree>
@@ -1339,7 +1451,7 @@
           <a:p>
             <a:fld id="{79CE77F9-1A7F-B148-A0AA-5828300D10BC}" type="slidenum">
               <a:rPr lang="pl-PL" smtClean="0"/>
-              <a:t>14</a:t>
+              <a:t>15</a:t>
             </a:fld>
             <a:endParaRPr lang="pl-PL"/>
           </a:p>
@@ -1537,7 +1649,13 @@
   <p:cSld>
     <p:spTree>
       <p:nvGrpSpPr>
-        <p:cNvPr id="1" name=""/>
+        <p:cNvPr id="1" name="">
+          <a:extLst>
+            <a:ext uri="{FF2B5EF4-FFF2-40B4-BE49-F238E27FC236}">
+              <a16:creationId xmlns:a16="http://schemas.microsoft.com/office/drawing/2014/main" id="{9785E031-F7BB-BAF1-F650-9A15EBCB2F2D}"/>
+            </a:ext>
+          </a:extLst>
+        </p:cNvPr>
         <p:cNvGrpSpPr/>
         <p:nvPr/>
       </p:nvGrpSpPr>
@@ -1551,7 +1669,13 @@
       </p:grpSpPr>
       <p:sp>
         <p:nvSpPr>
-          <p:cNvPr id="2" name="Slide Image Placeholder 1"/>
+          <p:cNvPr id="2" name="Slide Image Placeholder 1">
+            <a:extLst>
+              <a:ext uri="{FF2B5EF4-FFF2-40B4-BE49-F238E27FC236}">
+                <a16:creationId xmlns:a16="http://schemas.microsoft.com/office/drawing/2014/main" id="{D675F0D3-E215-7E8F-C233-7E4925EB69F0}"/>
+              </a:ext>
+            </a:extLst>
+          </p:cNvPr>
           <p:cNvSpPr>
             <a:spLocks noGrp="1" noRot="1" noChangeAspect="1"/>
           </p:cNvSpPr>
@@ -1563,7 +1687,13 @@
       </p:sp>
       <p:sp>
         <p:nvSpPr>
-          <p:cNvPr id="3" name="Notes Placeholder 2"/>
+          <p:cNvPr id="3" name="Notes Placeholder 2">
+            <a:extLst>
+              <a:ext uri="{FF2B5EF4-FFF2-40B4-BE49-F238E27FC236}">
+                <a16:creationId xmlns:a16="http://schemas.microsoft.com/office/drawing/2014/main" id="{E3ECB863-1A4B-7816-F616-60B61D604F56}"/>
+              </a:ext>
+            </a:extLst>
+          </p:cNvPr>
           <p:cNvSpPr>
             <a:spLocks noGrp="1"/>
           </p:cNvSpPr>
@@ -1585,7 +1715,13 @@
       </p:sp>
       <p:sp>
         <p:nvSpPr>
-          <p:cNvPr id="4" name="Slide Number Placeholder 3"/>
+          <p:cNvPr id="4" name="Slide Number Placeholder 3">
+            <a:extLst>
+              <a:ext uri="{FF2B5EF4-FFF2-40B4-BE49-F238E27FC236}">
+                <a16:creationId xmlns:a16="http://schemas.microsoft.com/office/drawing/2014/main" id="{EE15493F-C10D-D813-E5EC-7DF02C364132}"/>
+              </a:ext>
+            </a:extLst>
+          </p:cNvPr>
           <p:cNvSpPr>
             <a:spLocks noGrp="1"/>
           </p:cNvSpPr>
@@ -1609,7 +1745,7 @@
     </p:spTree>
     <p:extLst>
       <p:ext uri="{BB962C8B-B14F-4D97-AF65-F5344CB8AC3E}">
-        <p14:creationId xmlns:p14="http://schemas.microsoft.com/office/powerpoint/2010/main" val="2197585344"/>
+        <p14:creationId xmlns:p14="http://schemas.microsoft.com/office/powerpoint/2010/main" val="3797407970"/>
       </p:ext>
     </p:extLst>
   </p:cSld>
@@ -1696,7 +1832,7 @@
     </p:spTree>
     <p:extLst>
       <p:ext uri="{BB962C8B-B14F-4D97-AF65-F5344CB8AC3E}">
-        <p14:creationId xmlns:p14="http://schemas.microsoft.com/office/powerpoint/2010/main" val="3283827068"/>
+        <p14:creationId xmlns:p14="http://schemas.microsoft.com/office/powerpoint/2010/main" val="2197585344"/>
       </p:ext>
     </p:extLst>
   </p:cSld>
@@ -1783,7 +1919,7 @@
     </p:spTree>
     <p:extLst>
       <p:ext uri="{BB962C8B-B14F-4D97-AF65-F5344CB8AC3E}">
-        <p14:creationId xmlns:p14="http://schemas.microsoft.com/office/powerpoint/2010/main" val="2037939550"/>
+        <p14:creationId xmlns:p14="http://schemas.microsoft.com/office/powerpoint/2010/main" val="3283827068"/>
       </p:ext>
     </p:extLst>
   </p:cSld>
@@ -1870,7 +2006,7 @@
     </p:spTree>
     <p:extLst>
       <p:ext uri="{BB962C8B-B14F-4D97-AF65-F5344CB8AC3E}">
-        <p14:creationId xmlns:p14="http://schemas.microsoft.com/office/powerpoint/2010/main" val="3473981838"/>
+        <p14:creationId xmlns:p14="http://schemas.microsoft.com/office/powerpoint/2010/main" val="2037939550"/>
       </p:ext>
     </p:extLst>
   </p:cSld>
@@ -1957,7 +2093,7 @@
     </p:spTree>
     <p:extLst>
       <p:ext uri="{BB962C8B-B14F-4D97-AF65-F5344CB8AC3E}">
-        <p14:creationId xmlns:p14="http://schemas.microsoft.com/office/powerpoint/2010/main" val="3946396536"/>
+        <p14:creationId xmlns:p14="http://schemas.microsoft.com/office/powerpoint/2010/main" val="3473981838"/>
       </p:ext>
     </p:extLst>
   </p:cSld>
@@ -1972,13 +2108,7 @@
   <p:cSld>
     <p:spTree>
       <p:nvGrpSpPr>
-        <p:cNvPr id="1" name="">
-          <a:extLst>
-            <a:ext uri="{FF2B5EF4-FFF2-40B4-BE49-F238E27FC236}">
-              <a16:creationId xmlns:a16="http://schemas.microsoft.com/office/drawing/2014/main" id="{D09CFF8E-D8D4-0A3A-2952-40E1AE15BA29}"/>
-            </a:ext>
-          </a:extLst>
-        </p:cNvPr>
+        <p:cNvPr id="1" name=""/>
         <p:cNvGrpSpPr/>
         <p:nvPr/>
       </p:nvGrpSpPr>
@@ -1992,13 +2122,7 @@
       </p:grpSpPr>
       <p:sp>
         <p:nvSpPr>
-          <p:cNvPr id="2" name="Slide Image Placeholder 1">
-            <a:extLst>
-              <a:ext uri="{FF2B5EF4-FFF2-40B4-BE49-F238E27FC236}">
-                <a16:creationId xmlns:a16="http://schemas.microsoft.com/office/drawing/2014/main" id="{2D1B434F-87BD-3FED-7C94-3A7C47D780B2}"/>
-              </a:ext>
-            </a:extLst>
-          </p:cNvPr>
+          <p:cNvPr id="2" name="Slide Image Placeholder 1"/>
           <p:cNvSpPr>
             <a:spLocks noGrp="1" noRot="1" noChangeAspect="1"/>
           </p:cNvSpPr>
@@ -2010,13 +2134,7 @@
       </p:sp>
       <p:sp>
         <p:nvSpPr>
-          <p:cNvPr id="3" name="Notes Placeholder 2">
-            <a:extLst>
-              <a:ext uri="{FF2B5EF4-FFF2-40B4-BE49-F238E27FC236}">
-                <a16:creationId xmlns:a16="http://schemas.microsoft.com/office/drawing/2014/main" id="{CFA1E13D-0C08-1997-6BB7-A9C5971B594E}"/>
-              </a:ext>
-            </a:extLst>
-          </p:cNvPr>
+          <p:cNvPr id="3" name="Notes Placeholder 2"/>
           <p:cNvSpPr>
             <a:spLocks noGrp="1"/>
           </p:cNvSpPr>
@@ -2038,13 +2156,7 @@
       </p:sp>
       <p:sp>
         <p:nvSpPr>
-          <p:cNvPr id="4" name="Slide Number Placeholder 3">
-            <a:extLst>
-              <a:ext uri="{FF2B5EF4-FFF2-40B4-BE49-F238E27FC236}">
-                <a16:creationId xmlns:a16="http://schemas.microsoft.com/office/drawing/2014/main" id="{1CFA25F5-8928-F9B9-F31E-9A797DB529BE}"/>
-              </a:ext>
-            </a:extLst>
-          </p:cNvPr>
+          <p:cNvPr id="4" name="Slide Number Placeholder 3"/>
           <p:cNvSpPr>
             <a:spLocks noGrp="1"/>
           </p:cNvSpPr>
@@ -2068,7 +2180,7 @@
     </p:spTree>
     <p:extLst>
       <p:ext uri="{BB962C8B-B14F-4D97-AF65-F5344CB8AC3E}">
-        <p14:creationId xmlns:p14="http://schemas.microsoft.com/office/powerpoint/2010/main" val="1025112923"/>
+        <p14:creationId xmlns:p14="http://schemas.microsoft.com/office/powerpoint/2010/main" val="3946396536"/>
       </p:ext>
     </p:extLst>
   </p:cSld>
@@ -2257,7 +2369,7 @@
           <a:p>
             <a:fld id="{91017B01-0C30-B241-B19F-621BE4770608}" type="datetimeFigureOut">
               <a:rPr lang="pl-PL" smtClean="0"/>
-              <a:t>26.02.2025</a:t>
+              <a:t>22.02.2026</a:t>
             </a:fld>
             <a:endParaRPr lang="pl-PL"/>
           </a:p>
@@ -2426,7 +2538,7 @@
           <a:p>
             <a:fld id="{91017B01-0C30-B241-B19F-621BE4770608}" type="datetimeFigureOut">
               <a:rPr lang="pl-PL" smtClean="0"/>
-              <a:t>26.02.2025</a:t>
+              <a:t>22.02.2026</a:t>
             </a:fld>
             <a:endParaRPr lang="pl-PL"/>
           </a:p>
@@ -2605,7 +2717,7 @@
           <a:p>
             <a:fld id="{91017B01-0C30-B241-B19F-621BE4770608}" type="datetimeFigureOut">
               <a:rPr lang="pl-PL" smtClean="0"/>
-              <a:t>26.02.2025</a:t>
+              <a:t>22.02.2026</a:t>
             </a:fld>
             <a:endParaRPr lang="pl-PL"/>
           </a:p>
@@ -2774,7 +2886,7 @@
           <a:p>
             <a:fld id="{91017B01-0C30-B241-B19F-621BE4770608}" type="datetimeFigureOut">
               <a:rPr lang="pl-PL" smtClean="0"/>
-              <a:t>26.02.2025</a:t>
+              <a:t>22.02.2026</a:t>
             </a:fld>
             <a:endParaRPr lang="pl-PL"/>
           </a:p>
@@ -3020,7 +3132,7 @@
           <a:p>
             <a:fld id="{91017B01-0C30-B241-B19F-621BE4770608}" type="datetimeFigureOut">
               <a:rPr lang="pl-PL" smtClean="0"/>
-              <a:t>26.02.2025</a:t>
+              <a:t>22.02.2026</a:t>
             </a:fld>
             <a:endParaRPr lang="pl-PL"/>
           </a:p>
@@ -3306,7 +3418,7 @@
           <a:p>
             <a:fld id="{91017B01-0C30-B241-B19F-621BE4770608}" type="datetimeFigureOut">
               <a:rPr lang="pl-PL" smtClean="0"/>
-              <a:t>26.02.2025</a:t>
+              <a:t>22.02.2026</a:t>
             </a:fld>
             <a:endParaRPr lang="pl-PL"/>
           </a:p>
@@ -3726,7 +3838,7 @@
           <a:p>
             <a:fld id="{91017B01-0C30-B241-B19F-621BE4770608}" type="datetimeFigureOut">
               <a:rPr lang="pl-PL" smtClean="0"/>
-              <a:t>26.02.2025</a:t>
+              <a:t>22.02.2026</a:t>
             </a:fld>
             <a:endParaRPr lang="pl-PL"/>
           </a:p>
@@ -3844,7 +3956,7 @@
           <a:p>
             <a:fld id="{91017B01-0C30-B241-B19F-621BE4770608}" type="datetimeFigureOut">
               <a:rPr lang="pl-PL" smtClean="0"/>
-              <a:t>26.02.2025</a:t>
+              <a:t>22.02.2026</a:t>
             </a:fld>
             <a:endParaRPr lang="pl-PL"/>
           </a:p>
@@ -3940,7 +4052,7 @@
           <a:p>
             <a:fld id="{91017B01-0C30-B241-B19F-621BE4770608}" type="datetimeFigureOut">
               <a:rPr lang="pl-PL" smtClean="0"/>
-              <a:t>26.02.2025</a:t>
+              <a:t>22.02.2026</a:t>
             </a:fld>
             <a:endParaRPr lang="pl-PL"/>
           </a:p>
@@ -4217,7 +4329,7 @@
           <a:p>
             <a:fld id="{91017B01-0C30-B241-B19F-621BE4770608}" type="datetimeFigureOut">
               <a:rPr lang="pl-PL" smtClean="0"/>
-              <a:t>26.02.2025</a:t>
+              <a:t>22.02.2026</a:t>
             </a:fld>
             <a:endParaRPr lang="pl-PL"/>
           </a:p>
@@ -4473,7 +4585,7 @@
           <a:p>
             <a:fld id="{91017B01-0C30-B241-B19F-621BE4770608}" type="datetimeFigureOut">
               <a:rPr lang="pl-PL" smtClean="0"/>
-              <a:t>26.02.2025</a:t>
+              <a:t>22.02.2026</a:t>
             </a:fld>
             <a:endParaRPr lang="pl-PL"/>
           </a:p>
@@ -4685,7 +4797,7 @@
           <a:p>
             <a:fld id="{91017B01-0C30-B241-B19F-621BE4770608}" type="datetimeFigureOut">
               <a:rPr lang="pl-PL" smtClean="0"/>
-              <a:t>26.02.2025</a:t>
+              <a:t>22.02.2026</a:t>
             </a:fld>
             <a:endParaRPr lang="pl-PL"/>
           </a:p>
@@ -5287,6 +5399,126 @@
         <p:cNvPr id="1" name="">
           <a:extLst>
             <a:ext uri="{FF2B5EF4-FFF2-40B4-BE49-F238E27FC236}">
+              <a16:creationId xmlns:a16="http://schemas.microsoft.com/office/drawing/2014/main" id="{3EC85931-5F30-6DF4-9AC0-B9F68F197850}"/>
+            </a:ext>
+          </a:extLst>
+        </p:cNvPr>
+        <p:cNvGrpSpPr/>
+        <p:nvPr/>
+      </p:nvGrpSpPr>
+      <p:grpSpPr>
+        <a:xfrm>
+          <a:off x="0" y="0"/>
+          <a:ext cx="0" cy="0"/>
+          <a:chOff x="0" y="0"/>
+          <a:chExt cx="0" cy="0"/>
+        </a:xfrm>
+      </p:grpSpPr>
+      <p:sp>
+        <p:nvSpPr>
+          <p:cNvPr id="2" name="Rectangle 1">
+            <a:extLst>
+              <a:ext uri="{FF2B5EF4-FFF2-40B4-BE49-F238E27FC236}">
+                <a16:creationId xmlns:a16="http://schemas.microsoft.com/office/drawing/2014/main" id="{F9C57104-BFC8-496F-3C4F-1B6AF0602AB1}"/>
+              </a:ext>
+            </a:extLst>
+          </p:cNvPr>
+          <p:cNvSpPr/>
+          <p:nvPr/>
+        </p:nvSpPr>
+        <p:spPr>
+          <a:xfrm>
+            <a:off x="1979712" y="188640"/>
+            <a:ext cx="6696744" cy="492443"/>
+          </a:xfrm>
+          <a:prstGeom prst="rect">
+            <a:avLst/>
+          </a:prstGeom>
+        </p:spPr>
+        <p:txBody>
+          <a:bodyPr wrap="square">
+            <a:spAutoFit/>
+          </a:bodyPr>
+          <a:lstStyle/>
+          <a:p>
+            <a:pPr algn="ctr"/>
+            <a:r>
+              <a:rPr lang="pl-PL" sz="2600" dirty="0">
+                <a:solidFill>
+                  <a:schemeClr val="bg1"/>
+                </a:solidFill>
+                <a:latin typeface="Verdana" panose="020B0604030504040204" pitchFamily="34" charset="0"/>
+                <a:ea typeface="Verdana" panose="020B0604030504040204" pitchFamily="34" charset="0"/>
+                <a:cs typeface="Verdana" panose="020B0604030504040204" pitchFamily="34" charset="0"/>
+              </a:rPr>
+              <a:t>Kotlin</a:t>
+            </a:r>
+          </a:p>
+        </p:txBody>
+      </p:sp>
+      <p:pic>
+        <p:nvPicPr>
+          <p:cNvPr id="5" name="Obraz 4">
+            <a:extLst>
+              <a:ext uri="{FF2B5EF4-FFF2-40B4-BE49-F238E27FC236}">
+                <a16:creationId xmlns:a16="http://schemas.microsoft.com/office/drawing/2014/main" id="{D6543BEF-795C-B45A-FDE5-C65D8230F28E}"/>
+              </a:ext>
+            </a:extLst>
+          </p:cNvPr>
+          <p:cNvPicPr>
+            <a:picLocks noChangeAspect="1"/>
+          </p:cNvPicPr>
+          <p:nvPr/>
+        </p:nvPicPr>
+        <p:blipFill>
+          <a:blip r:embed="rId4"/>
+          <a:stretch>
+            <a:fillRect/>
+          </a:stretch>
+        </p:blipFill>
+        <p:spPr>
+          <a:xfrm>
+            <a:off x="1043608" y="847281"/>
+            <a:ext cx="5064993" cy="3849666"/>
+          </a:xfrm>
+          <a:prstGeom prst="rect">
+            <a:avLst/>
+          </a:prstGeom>
+        </p:spPr>
+      </p:pic>
+    </p:spTree>
+    <p:extLst>
+      <p:ext uri="{BB962C8B-B14F-4D97-AF65-F5344CB8AC3E}">
+        <p14:creationId xmlns:p14="http://schemas.microsoft.com/office/powerpoint/2010/main" val="1081900127"/>
+      </p:ext>
+    </p:extLst>
+  </p:cSld>
+  <p:clrMapOvr>
+    <a:masterClrMapping/>
+  </p:clrMapOvr>
+</p:sld>
+</file>
+
+<file path=ppt/slides/slide11.xml><?xml version="1.0" encoding="utf-8"?>
+<p:sld xmlns:a="http://schemas.openxmlformats.org/drawingml/2006/main" xmlns:r="http://schemas.openxmlformats.org/officeDocument/2006/relationships" xmlns:p="http://schemas.openxmlformats.org/presentationml/2006/main">
+  <p:cSld>
+    <p:bg>
+      <p:bgPr>
+        <a:blipFill dpi="0" rotWithShape="0">
+          <a:blip r:embed="rId3" cstate="print"/>
+          <a:srcRect/>
+          <a:stretch>
+            <a:fillRect/>
+          </a:stretch>
+        </a:blipFill>
+        <a:effectLst/>
+      </p:bgPr>
+    </p:bg>
+    <p:spTree>
+      <p:nvGrpSpPr>
+        <p:cNvPr id="1" name="">
+          <a:extLst>
+            <a:ext uri="{FF2B5EF4-FFF2-40B4-BE49-F238E27FC236}">
               <a16:creationId xmlns:a16="http://schemas.microsoft.com/office/drawing/2014/main" id="{36B5FAEA-8CD7-AB03-3776-133698232475}"/>
             </a:ext>
           </a:extLst>
@@ -5417,7 +5649,7 @@
 </p:sld>
 </file>
 
-<file path=ppt/slides/slide11.xml><?xml version="1.0" encoding="utf-8"?>
+<file path=ppt/slides/slide12.xml><?xml version="1.0" encoding="utf-8"?>
 <p:sld xmlns:a="http://schemas.openxmlformats.org/drawingml/2006/main" xmlns:r="http://schemas.openxmlformats.org/officeDocument/2006/relationships" xmlns:p="http://schemas.openxmlformats.org/presentationml/2006/main">
   <p:cSld>
     <p:bg>
@@ -5597,7 +5829,7 @@
 </p:sld>
 </file>
 
-<file path=ppt/slides/slide12.xml><?xml version="1.0" encoding="utf-8"?>
+<file path=ppt/slides/slide13.xml><?xml version="1.0" encoding="utf-8"?>
 <p:sld xmlns:a="http://schemas.openxmlformats.org/drawingml/2006/main" xmlns:r="http://schemas.openxmlformats.org/officeDocument/2006/relationships" xmlns:p="http://schemas.openxmlformats.org/presentationml/2006/main">
   <p:cSld>
     <p:bg>
@@ -5723,7 +5955,7 @@
 </p:sld>
 </file>
 
-<file path=ppt/slides/slide13.xml><?xml version="1.0" encoding="utf-8"?>
+<file path=ppt/slides/slide14.xml><?xml version="1.0" encoding="utf-8"?>
 <p:sld xmlns:a="http://schemas.openxmlformats.org/drawingml/2006/main" xmlns:r="http://schemas.openxmlformats.org/officeDocument/2006/relationships" xmlns:p="http://schemas.openxmlformats.org/presentationml/2006/main">
   <p:cSld>
     <p:bg>
@@ -5843,7 +6075,7 @@
 </p:sld>
 </file>
 
-<file path=ppt/slides/slide14.xml><?xml version="1.0" encoding="utf-8"?>
+<file path=ppt/slides/slide15.xml><?xml version="1.0" encoding="utf-8"?>
 <p:sld xmlns:a="http://schemas.openxmlformats.org/drawingml/2006/main" xmlns:r="http://schemas.openxmlformats.org/officeDocument/2006/relationships" xmlns:p="http://schemas.openxmlformats.org/presentationml/2006/main">
   <p:cSld>
     <p:bg>
@@ -6400,7 +6632,7 @@
         <p:spPr>
           <a:xfrm>
             <a:off x="971600" y="681083"/>
-            <a:ext cx="8244408" cy="6275051"/>
+            <a:ext cx="8244408" cy="5859553"/>
           </a:xfrm>
           <a:prstGeom prst="rect">
             <a:avLst/>
@@ -6413,7 +6645,7 @@
           </a:bodyPr>
           <a:lstStyle/>
           <a:p>
-            <a:pPr>
+            <a:pPr algn="just">
               <a:lnSpc>
                 <a:spcPct val="150000"/>
               </a:lnSpc>
@@ -6431,7 +6663,7 @@
             </a:r>
           </a:p>
           <a:p>
-            <a:pPr marL="285750" indent="-285750">
+            <a:pPr marL="285750" indent="-285750" algn="just">
               <a:lnSpc>
                 <a:spcPct val="150000"/>
               </a:lnSpc>
@@ -6447,20 +6679,21 @@
                 <a:latin typeface="Times New Roman" panose="02020603050405020304" pitchFamily="18" charset="0"/>
                 <a:cs typeface="Times New Roman" panose="02020603050405020304" pitchFamily="18" charset="0"/>
               </a:rPr>
-              <a:t>Na zajęcia przewidzianych jest </a:t>
-            </a:r>
-            <a:r>
-              <a:rPr lang="pl-PL" sz="1800" b="1" dirty="0">
-                <a:solidFill>
-                  <a:schemeClr val="tx1"/>
-                </a:solidFill>
+              <a:t>Przewidzianych jest </a:t>
+            </a:r>
+            <a:r>
+              <a:rPr lang="pl-PL" sz="1800" b="1" i="0" dirty="0">
+                <a:solidFill>
+                  <a:schemeClr val="tx1"/>
+                </a:solidFill>
+                <a:effectLst/>
                 <a:latin typeface="Times New Roman" panose="02020603050405020304" pitchFamily="18" charset="0"/>
                 <a:cs typeface="Times New Roman" panose="02020603050405020304" pitchFamily="18" charset="0"/>
               </a:rPr>
-              <a:t>7</a:t>
-            </a:r>
-            <a:r>
-              <a:rPr lang="pl-PL" sz="1800" b="1" i="0" dirty="0">
+              <a:t>6 list zadań</a:t>
+            </a:r>
+            <a:r>
+              <a:rPr lang="pl-PL" sz="1800" b="0" i="0" dirty="0">
                 <a:solidFill>
                   <a:schemeClr val="tx1"/>
                 </a:solidFill>
@@ -6468,29 +6701,11 @@
                 <a:latin typeface="Times New Roman" panose="02020603050405020304" pitchFamily="18" charset="0"/>
                 <a:cs typeface="Times New Roman" panose="02020603050405020304" pitchFamily="18" charset="0"/>
               </a:rPr>
-              <a:t> list zadań</a:t>
-            </a:r>
-            <a:r>
-              <a:rPr lang="pl-PL" sz="1800" b="0" i="0" dirty="0">
-                <a:solidFill>
-                  <a:schemeClr val="tx1"/>
-                </a:solidFill>
-                <a:effectLst/>
-                <a:latin typeface="Times New Roman" panose="02020603050405020304" pitchFamily="18" charset="0"/>
-                <a:cs typeface="Times New Roman" panose="02020603050405020304" pitchFamily="18" charset="0"/>
-              </a:rPr>
               <a:t>.</a:t>
             </a:r>
-            <a:endParaRPr lang="pl-PL" sz="1800" dirty="0">
-              <a:solidFill>
-                <a:schemeClr val="tx1"/>
-              </a:solidFill>
-              <a:latin typeface="Times New Roman" panose="02020603050405020304" pitchFamily="18" charset="0"/>
-              <a:cs typeface="Times New Roman" panose="02020603050405020304" pitchFamily="18" charset="0"/>
-            </a:endParaRPr>
-          </a:p>
-          <a:p>
-            <a:pPr marL="285750" indent="-285750">
+          </a:p>
+          <a:p>
+            <a:pPr marL="285750" indent="-285750" algn="just">
               <a:lnSpc>
                 <a:spcPct val="150000"/>
               </a:lnSpc>
@@ -6530,16 +6745,9 @@
               </a:rPr>
               <a:t>.</a:t>
             </a:r>
-            <a:endParaRPr lang="pl-PL" sz="1800" dirty="0">
-              <a:solidFill>
-                <a:schemeClr val="tx1"/>
-              </a:solidFill>
-              <a:latin typeface="Times New Roman" panose="02020603050405020304" pitchFamily="18" charset="0"/>
-              <a:cs typeface="Times New Roman" panose="02020603050405020304" pitchFamily="18" charset="0"/>
-            </a:endParaRPr>
-          </a:p>
-          <a:p>
-            <a:pPr marL="285750" indent="-285750">
+          </a:p>
+          <a:p>
+            <a:pPr marL="285750" indent="-285750" algn="just">
               <a:lnSpc>
                 <a:spcPct val="150000"/>
               </a:lnSpc>
@@ -6547,7 +6755,7 @@
               <a:buChar char="•"/>
             </a:pPr>
             <a:r>
-              <a:rPr lang="pl-PL" sz="1800" b="1" i="0" dirty="0">
+              <a:rPr lang="pl-PL" sz="1800" b="0" i="0" dirty="0">
                 <a:solidFill>
                   <a:schemeClr val="tx1"/>
                 </a:solidFill>
@@ -6555,10 +6763,10 @@
                 <a:latin typeface="Times New Roman" panose="02020603050405020304" pitchFamily="18" charset="0"/>
                 <a:cs typeface="Times New Roman" panose="02020603050405020304" pitchFamily="18" charset="0"/>
               </a:rPr>
-              <a:t>Nie jest konieczne </a:t>
-            </a:r>
-            <a:r>
-              <a:rPr lang="pl-PL" sz="1800" b="0" i="0" dirty="0">
+              <a:t>Dopuszczalne jest </a:t>
+            </a:r>
+            <a:r>
+              <a:rPr lang="pl-PL" sz="1800" b="1" i="0" dirty="0">
                 <a:solidFill>
                   <a:schemeClr val="tx1"/>
                 </a:solidFill>
@@ -6566,9 +6774,9 @@
                 <a:latin typeface="Times New Roman" panose="02020603050405020304" pitchFamily="18" charset="0"/>
                 <a:cs typeface="Times New Roman" panose="02020603050405020304" pitchFamily="18" charset="0"/>
               </a:rPr>
-              <a:t>zaliczenie wszystkich list aby otrzymać ocenę pozytywną</a:t>
-            </a:r>
-            <a:br>
+              <a:t>nieoddanie</a:t>
+            </a:r>
+            <a:r>
               <a:rPr lang="pl-PL" sz="1800" b="0" i="0" dirty="0">
                 <a:solidFill>
                   <a:schemeClr val="tx1"/>
@@ -6577,9 +6785,10 @@
                 <a:latin typeface="Times New Roman" panose="02020603050405020304" pitchFamily="18" charset="0"/>
                 <a:cs typeface="Times New Roman" panose="02020603050405020304" pitchFamily="18" charset="0"/>
               </a:rPr>
-            </a:br>
-            <a:r>
-              <a:rPr lang="pl-PL" sz="1800" b="0" i="0" dirty="0">
+              <a:t> lub </a:t>
+            </a:r>
+            <a:r>
+              <a:rPr lang="pl-PL" sz="1800" b="1" i="0" dirty="0">
                 <a:solidFill>
                   <a:schemeClr val="tx1"/>
                 </a:solidFill>
@@ -6587,29 +6796,44 @@
                 <a:latin typeface="Times New Roman" panose="02020603050405020304" pitchFamily="18" charset="0"/>
                 <a:cs typeface="Times New Roman" panose="02020603050405020304" pitchFamily="18" charset="0"/>
               </a:rPr>
-              <a:t>z laboratorium.</a:t>
-            </a:r>
-            <a:r>
-              <a:rPr lang="pl-PL" sz="1800" dirty="0">
-                <a:solidFill>
-                  <a:schemeClr val="tx1"/>
-                </a:solidFill>
+              <a:t>niezaliczenie</a:t>
+            </a:r>
+            <a:r>
+              <a:rPr lang="pl-PL" sz="1800" b="0" i="0" dirty="0">
+                <a:solidFill>
+                  <a:schemeClr val="tx1"/>
+                </a:solidFill>
+                <a:effectLst/>
                 <a:latin typeface="Times New Roman" panose="02020603050405020304" pitchFamily="18" charset="0"/>
                 <a:cs typeface="Times New Roman" panose="02020603050405020304" pitchFamily="18" charset="0"/>
               </a:rPr>
-              <a:t> Dopuszczalne jest nieoddanie/niezaliczenie dwóch list.</a:t>
-            </a:r>
-            <a:endParaRPr lang="pl-PL" sz="1800" b="0" i="0" dirty="0">
-              <a:solidFill>
-                <a:schemeClr val="tx1"/>
-              </a:solidFill>
-              <a:effectLst/>
-              <a:latin typeface="Times New Roman" panose="02020603050405020304" pitchFamily="18" charset="0"/>
-              <a:cs typeface="Times New Roman" panose="02020603050405020304" pitchFamily="18" charset="0"/>
-            </a:endParaRPr>
-          </a:p>
-          <a:p>
-            <a:pPr marL="285750" indent="-285750">
+              <a:t> jednej listy. Za tą listę student otrzymuje </a:t>
+            </a:r>
+            <a:r>
+              <a:rPr lang="pl-PL" sz="1800" b="1" i="0" dirty="0">
+                <a:solidFill>
+                  <a:schemeClr val="tx1"/>
+                </a:solidFill>
+                <a:effectLst/>
+                <a:latin typeface="Times New Roman" panose="02020603050405020304" pitchFamily="18" charset="0"/>
+                <a:cs typeface="Times New Roman" panose="02020603050405020304" pitchFamily="18" charset="0"/>
+              </a:rPr>
+              <a:t>ocenę 2.0</a:t>
+            </a:r>
+            <a:r>
+              <a:rPr lang="pl-PL" sz="1800" b="0" i="0" dirty="0">
+                <a:solidFill>
+                  <a:schemeClr val="tx1"/>
+                </a:solidFill>
+                <a:effectLst/>
+                <a:latin typeface="Times New Roman" panose="02020603050405020304" pitchFamily="18" charset="0"/>
+                <a:cs typeface="Times New Roman" panose="02020603050405020304" pitchFamily="18" charset="0"/>
+              </a:rPr>
+              <a:t>.</a:t>
+            </a:r>
+          </a:p>
+          <a:p>
+            <a:pPr marL="285750" indent="-285750" algn="just">
               <a:lnSpc>
                 <a:spcPct val="150000"/>
               </a:lnSpc>
@@ -6625,7 +6849,7 @@
                 <a:latin typeface="Times New Roman" panose="02020603050405020304" pitchFamily="18" charset="0"/>
                 <a:cs typeface="Times New Roman" panose="02020603050405020304" pitchFamily="18" charset="0"/>
               </a:rPr>
-              <a:t>Każda lista posiada informację o </a:t>
+              <a:t>Każda lista ma </a:t>
             </a:r>
             <a:r>
               <a:rPr lang="pl-PL" sz="1800" b="1" i="0" dirty="0">
@@ -6636,10 +6860,10 @@
                 <a:latin typeface="Times New Roman" panose="02020603050405020304" pitchFamily="18" charset="0"/>
                 <a:cs typeface="Times New Roman" panose="02020603050405020304" pitchFamily="18" charset="0"/>
               </a:rPr>
-              <a:t>liczbie punktów </a:t>
-            </a:r>
-            <a:r>
-              <a:rPr lang="pl-PL" sz="1800" i="0" dirty="0">
+              <a:t>określony termin zwrotu </a:t>
+            </a:r>
+            <a:r>
+              <a:rPr lang="pl-PL" sz="1800" b="0" i="0" dirty="0">
                 <a:solidFill>
                   <a:schemeClr val="tx1"/>
                 </a:solidFill>
@@ -6647,11 +6871,55 @@
                 <a:latin typeface="Times New Roman" panose="02020603050405020304" pitchFamily="18" charset="0"/>
                 <a:cs typeface="Times New Roman" panose="02020603050405020304" pitchFamily="18" charset="0"/>
               </a:rPr>
-              <a:t>wymaganych na konkretną ocenę</a:t>
-            </a:r>
-          </a:p>
-          <a:p>
-            <a:pPr marL="285750" indent="-285750">
+              <a:t>i </a:t>
+            </a:r>
+            <a:r>
+              <a:rPr lang="pl-PL" sz="1800" b="1" i="0" dirty="0">
+                <a:solidFill>
+                  <a:schemeClr val="tx1"/>
+                </a:solidFill>
+                <a:effectLst/>
+                <a:latin typeface="Times New Roman" panose="02020603050405020304" pitchFamily="18" charset="0"/>
+                <a:cs typeface="Times New Roman" panose="02020603050405020304" pitchFamily="18" charset="0"/>
+              </a:rPr>
+              <a:t>punktację</a:t>
+            </a:r>
+            <a:r>
+              <a:rPr lang="pl-PL" sz="1800" b="0" i="0" dirty="0">
+                <a:solidFill>
+                  <a:schemeClr val="tx1"/>
+                </a:solidFill>
+                <a:effectLst/>
+                <a:latin typeface="Times New Roman" panose="02020603050405020304" pitchFamily="18" charset="0"/>
+                <a:cs typeface="Times New Roman" panose="02020603050405020304" pitchFamily="18" charset="0"/>
+              </a:rPr>
+              <a:t>. Za każdy tydzień opóźnienia ocena </a:t>
+            </a:r>
+            <a:r>
+              <a:rPr lang="pl-PL" sz="1800" b="1" i="0" dirty="0">
+                <a:solidFill>
+                  <a:schemeClr val="tx1"/>
+                </a:solidFill>
+                <a:effectLst/>
+                <a:latin typeface="Times New Roman" panose="02020603050405020304" pitchFamily="18" charset="0"/>
+                <a:cs typeface="Times New Roman" panose="02020603050405020304" pitchFamily="18" charset="0"/>
+              </a:rPr>
+              <a:t>obniżana jest o 1</a:t>
+            </a:r>
+            <a:r>
+              <a:rPr lang="pl-PL" sz="1800" b="0" i="0" dirty="0">
+                <a:solidFill>
+                  <a:schemeClr val="tx1"/>
+                </a:solidFill>
+                <a:effectLst/>
+                <a:latin typeface="Times New Roman" panose="02020603050405020304" pitchFamily="18" charset="0"/>
+                <a:cs typeface="Times New Roman" panose="02020603050405020304" pitchFamily="18" charset="0"/>
+              </a:rPr>
+              <a:t>.</a:t>
+            </a:r>
+          </a:p>
+          <a:p>
+            <a:pPr marL="285750" indent="-285750" algn="just">
               <a:lnSpc>
                 <a:spcPct val="150000"/>
               </a:lnSpc>
@@ -6667,7 +6935,7 @@
                 <a:latin typeface="Times New Roman" panose="02020603050405020304" pitchFamily="18" charset="0"/>
                 <a:cs typeface="Times New Roman" panose="02020603050405020304" pitchFamily="18" charset="0"/>
               </a:rPr>
-              <a:t>Każda lista posiada </a:t>
+              <a:t>Listy oddawane są </a:t>
             </a:r>
             <a:r>
               <a:rPr lang="pl-PL" sz="1800" b="1" i="0" dirty="0">
@@ -6678,7 +6946,7 @@
                 <a:latin typeface="Times New Roman" panose="02020603050405020304" pitchFamily="18" charset="0"/>
                 <a:cs typeface="Times New Roman" panose="02020603050405020304" pitchFamily="18" charset="0"/>
               </a:rPr>
-              <a:t>termin zwrotu</a:t>
+              <a:t>podczas</a:t>
             </a:r>
             <a:r>
               <a:rPr lang="pl-PL" sz="1800" b="0" i="0" dirty="0">
@@ -6689,11 +6957,11 @@
                 <a:latin typeface="Times New Roman" panose="02020603050405020304" pitchFamily="18" charset="0"/>
                 <a:cs typeface="Times New Roman" panose="02020603050405020304" pitchFamily="18" charset="0"/>
               </a:rPr>
-              <a:t>.</a:t>
-            </a:r>
-          </a:p>
-          <a:p>
-            <a:pPr marL="285750" indent="-285750">
+              <a:t> zajęć laboratoryjnych.</a:t>
+            </a:r>
+          </a:p>
+          <a:p>
+            <a:pPr marL="285750" indent="-285750" algn="just">
               <a:lnSpc>
                 <a:spcPct val="150000"/>
               </a:lnSpc>
@@ -6709,7 +6977,7 @@
                 <a:latin typeface="Times New Roman" panose="02020603050405020304" pitchFamily="18" charset="0"/>
                 <a:cs typeface="Times New Roman" panose="02020603050405020304" pitchFamily="18" charset="0"/>
               </a:rPr>
-              <a:t>Za każdy tydzień opóźnienia otrzymana ocena jest </a:t>
+              <a:t>Do list zadań dołączana jest lista pytań, na które student jest </a:t>
             </a:r>
             <a:r>
               <a:rPr lang="pl-PL" sz="1800" b="1" i="0" dirty="0">
@@ -6720,7 +6988,7 @@
                 <a:latin typeface="Times New Roman" panose="02020603050405020304" pitchFamily="18" charset="0"/>
                 <a:cs typeface="Times New Roman" panose="02020603050405020304" pitchFamily="18" charset="0"/>
               </a:rPr>
-              <a:t>obniżana o 1</a:t>
+              <a:t>zobowiązany odpowiedzieć ustnie </a:t>
             </a:r>
             <a:r>
               <a:rPr lang="pl-PL" sz="1800" b="0" i="0" dirty="0">
@@ -6731,308 +6999,7 @@
                 <a:latin typeface="Times New Roman" panose="02020603050405020304" pitchFamily="18" charset="0"/>
                 <a:cs typeface="Times New Roman" panose="02020603050405020304" pitchFamily="18" charset="0"/>
               </a:rPr>
-              <a:t>.</a:t>
-            </a:r>
-          </a:p>
-          <a:p>
-            <a:pPr marL="285750" indent="-285750">
-              <a:lnSpc>
-                <a:spcPct val="150000"/>
-              </a:lnSpc>
-              <a:buFont typeface="Arial" panose="020B0604020202020204" pitchFamily="34" charset="0"/>
-              <a:buChar char="•"/>
-            </a:pPr>
-            <a:r>
-              <a:rPr lang="pl-PL" sz="1800" b="0" i="0" dirty="0">
-                <a:solidFill>
-                  <a:schemeClr val="tx1"/>
-                </a:solidFill>
-                <a:effectLst/>
-                <a:latin typeface="Times New Roman" panose="02020603050405020304" pitchFamily="18" charset="0"/>
-                <a:cs typeface="Times New Roman" panose="02020603050405020304" pitchFamily="18" charset="0"/>
-              </a:rPr>
-              <a:t>Listy oddawane są </a:t>
-            </a:r>
-            <a:r>
-              <a:rPr lang="pl-PL" sz="1800" b="1" i="0" dirty="0">
-                <a:solidFill>
-                  <a:schemeClr val="tx1"/>
-                </a:solidFill>
-                <a:effectLst/>
-                <a:latin typeface="Times New Roman" panose="02020603050405020304" pitchFamily="18" charset="0"/>
-                <a:cs typeface="Times New Roman" panose="02020603050405020304" pitchFamily="18" charset="0"/>
-              </a:rPr>
-              <a:t>podczas zajęć </a:t>
-            </a:r>
-            <a:r>
-              <a:rPr lang="pl-PL" sz="1800" b="0" i="0" dirty="0">
-                <a:solidFill>
-                  <a:schemeClr val="tx1"/>
-                </a:solidFill>
-                <a:effectLst/>
-                <a:latin typeface="Times New Roman" panose="02020603050405020304" pitchFamily="18" charset="0"/>
-                <a:cs typeface="Times New Roman" panose="02020603050405020304" pitchFamily="18" charset="0"/>
-              </a:rPr>
-              <a:t>laboratoryjnych. </a:t>
-            </a:r>
-          </a:p>
-          <a:p>
-            <a:pPr marL="285750" indent="-285750">
-              <a:lnSpc>
-                <a:spcPct val="150000"/>
-              </a:lnSpc>
-              <a:buFont typeface="Arial" panose="020B0604020202020204" pitchFamily="34" charset="0"/>
-              <a:buChar char="•"/>
-            </a:pPr>
-            <a:r>
-              <a:rPr lang="pl-PL" sz="1800" dirty="0">
-                <a:solidFill>
-                  <a:schemeClr val="tx1"/>
-                </a:solidFill>
-                <a:latin typeface="Times New Roman" panose="02020603050405020304" pitchFamily="18" charset="0"/>
-                <a:cs typeface="Times New Roman" panose="02020603050405020304" pitchFamily="18" charset="0"/>
-              </a:rPr>
-              <a:t>Do każdego zadania prowadzący </a:t>
-            </a:r>
-            <a:r>
-              <a:rPr lang="pl-PL" sz="1800" b="1" dirty="0">
-                <a:solidFill>
-                  <a:schemeClr val="tx1"/>
-                </a:solidFill>
-                <a:latin typeface="Times New Roman" panose="02020603050405020304" pitchFamily="18" charset="0"/>
-                <a:cs typeface="Times New Roman" panose="02020603050405020304" pitchFamily="18" charset="0"/>
-              </a:rPr>
-              <a:t>może zadać dodatkowe pytania</a:t>
-            </a:r>
-            <a:r>
-              <a:rPr lang="pl-PL" sz="1800" dirty="0">
-                <a:solidFill>
-                  <a:schemeClr val="tx1"/>
-                </a:solidFill>
-                <a:latin typeface="Times New Roman" panose="02020603050405020304" pitchFamily="18" charset="0"/>
-                <a:cs typeface="Times New Roman" panose="02020603050405020304" pitchFamily="18" charset="0"/>
-              </a:rPr>
-              <a:t>.</a:t>
-            </a:r>
-          </a:p>
-          <a:p>
-            <a:pPr marL="285750" indent="-285750">
-              <a:lnSpc>
-                <a:spcPct val="150000"/>
-              </a:lnSpc>
-              <a:buFont typeface="Arial" panose="020B0604020202020204" pitchFamily="34" charset="0"/>
-              <a:buChar char="•"/>
-            </a:pPr>
-            <a:r>
-              <a:rPr lang="pl-PL" sz="1800" b="0" i="0" dirty="0">
-                <a:solidFill>
-                  <a:schemeClr val="tx1"/>
-                </a:solidFill>
-                <a:effectLst/>
-                <a:latin typeface="Times New Roman" panose="02020603050405020304" pitchFamily="18" charset="0"/>
-                <a:cs typeface="Times New Roman" panose="02020603050405020304" pitchFamily="18" charset="0"/>
-              </a:rPr>
-              <a:t>Liczba punktów za</a:t>
-            </a:r>
-            <a:r>
-              <a:rPr lang="pl-PL" sz="1800" dirty="0">
-                <a:solidFill>
-                  <a:schemeClr val="tx1"/>
-                </a:solidFill>
-                <a:latin typeface="Times New Roman" panose="02020603050405020304" pitchFamily="18" charset="0"/>
-                <a:cs typeface="Times New Roman" panose="02020603050405020304" pitchFamily="18" charset="0"/>
-              </a:rPr>
-              <a:t> listę jest przyznawana na podstawie </a:t>
-            </a:r>
-            <a:r>
-              <a:rPr lang="pl-PL" sz="1800" b="1" dirty="0">
-                <a:solidFill>
-                  <a:schemeClr val="tx1"/>
-                </a:solidFill>
-                <a:latin typeface="Times New Roman" panose="02020603050405020304" pitchFamily="18" charset="0"/>
-                <a:cs typeface="Times New Roman" panose="02020603050405020304" pitchFamily="18" charset="0"/>
-              </a:rPr>
-              <a:t>poprawności wykonania zadań</a:t>
-            </a:r>
-            <a:r>
-              <a:rPr lang="pl-PL" sz="1800" dirty="0">
-                <a:solidFill>
-                  <a:schemeClr val="tx1"/>
-                </a:solidFill>
-                <a:latin typeface="Times New Roman" panose="02020603050405020304" pitchFamily="18" charset="0"/>
-                <a:cs typeface="Times New Roman" panose="02020603050405020304" pitchFamily="18" charset="0"/>
-              </a:rPr>
-              <a:t> oraz </a:t>
-            </a:r>
-            <a:r>
-              <a:rPr lang="pl-PL" sz="1800" b="1" dirty="0">
-                <a:solidFill>
-                  <a:schemeClr val="tx1"/>
-                </a:solidFill>
-                <a:latin typeface="Times New Roman" panose="02020603050405020304" pitchFamily="18" charset="0"/>
-                <a:cs typeface="Times New Roman" panose="02020603050405020304" pitchFamily="18" charset="0"/>
-              </a:rPr>
-              <a:t>odpowiedzi ustnej</a:t>
-            </a:r>
-            <a:r>
-              <a:rPr lang="pl-PL" sz="1800" dirty="0">
-                <a:solidFill>
-                  <a:schemeClr val="tx1"/>
-                </a:solidFill>
-                <a:latin typeface="Times New Roman" panose="02020603050405020304" pitchFamily="18" charset="0"/>
-                <a:cs typeface="Times New Roman" panose="02020603050405020304" pitchFamily="18" charset="0"/>
-              </a:rPr>
-              <a:t>.</a:t>
-            </a:r>
-            <a:endParaRPr lang="pl-PL" sz="1800" b="0" i="0" dirty="0">
-              <a:solidFill>
-                <a:schemeClr val="tx1"/>
-              </a:solidFill>
-              <a:effectLst/>
-              <a:latin typeface="Times New Roman" panose="02020603050405020304" pitchFamily="18" charset="0"/>
-              <a:cs typeface="Times New Roman" panose="02020603050405020304" pitchFamily="18" charset="0"/>
-            </a:endParaRPr>
-          </a:p>
-          <a:p>
-            <a:pPr marL="285750" indent="-285750">
-              <a:lnSpc>
-                <a:spcPct val="150000"/>
-              </a:lnSpc>
-              <a:buFont typeface="Arial" panose="020B0604020202020204" pitchFamily="34" charset="0"/>
-              <a:buChar char="•"/>
-            </a:pPr>
-            <a:r>
-              <a:rPr lang="pl-PL" sz="1800" b="0" i="0" dirty="0">
-                <a:solidFill>
-                  <a:schemeClr val="tx1"/>
-                </a:solidFill>
-                <a:effectLst/>
-                <a:latin typeface="Times New Roman" panose="02020603050405020304" pitchFamily="18" charset="0"/>
-                <a:cs typeface="Times New Roman" panose="02020603050405020304" pitchFamily="18" charset="0"/>
-              </a:rPr>
-              <a:t>Ocena końcowa jest </a:t>
-            </a:r>
-            <a:r>
-              <a:rPr lang="pl-PL" sz="1800" b="1" i="0" dirty="0">
-                <a:solidFill>
-                  <a:schemeClr val="tx1"/>
-                </a:solidFill>
-                <a:effectLst/>
-                <a:latin typeface="Times New Roman" panose="02020603050405020304" pitchFamily="18" charset="0"/>
-                <a:cs typeface="Times New Roman" panose="02020603050405020304" pitchFamily="18" charset="0"/>
-              </a:rPr>
-              <a:t>średnią arytmetyczną </a:t>
-            </a:r>
-            <a:r>
-              <a:rPr lang="pl-PL" sz="1800" b="0" i="0" dirty="0">
-                <a:solidFill>
-                  <a:schemeClr val="tx1"/>
-                </a:solidFill>
-                <a:effectLst/>
-                <a:latin typeface="Times New Roman" panose="02020603050405020304" pitchFamily="18" charset="0"/>
-                <a:cs typeface="Times New Roman" panose="02020603050405020304" pitchFamily="18" charset="0"/>
-              </a:rPr>
-              <a:t>ze </a:t>
-            </a:r>
-            <a:r>
-              <a:rPr lang="pl-PL" sz="1800" b="1" i="0" dirty="0">
-                <a:solidFill>
-                  <a:schemeClr val="tx1"/>
-                </a:solidFill>
-                <a:effectLst/>
-                <a:latin typeface="Times New Roman" panose="02020603050405020304" pitchFamily="18" charset="0"/>
-                <a:cs typeface="Times New Roman" panose="02020603050405020304" pitchFamily="18" charset="0"/>
-              </a:rPr>
-              <a:t>wszystkich ocen </a:t>
-            </a:r>
-            <a:r>
-              <a:rPr lang="pl-PL" sz="1800" b="0" i="0" dirty="0">
-                <a:solidFill>
-                  <a:schemeClr val="tx1"/>
-                </a:solidFill>
-                <a:effectLst/>
-                <a:latin typeface="Times New Roman" panose="02020603050405020304" pitchFamily="18" charset="0"/>
-                <a:cs typeface="Times New Roman" panose="02020603050405020304" pitchFamily="18" charset="0"/>
-              </a:rPr>
-              <a:t>z list.</a:t>
-            </a:r>
-          </a:p>
-          <a:p>
-            <a:pPr marL="285750" indent="-285750">
-              <a:lnSpc>
-                <a:spcPct val="150000"/>
-              </a:lnSpc>
-              <a:buFont typeface="Arial" panose="020B0604020202020204" pitchFamily="34" charset="0"/>
-              <a:buChar char="•"/>
-            </a:pPr>
-            <a:r>
-              <a:rPr lang="pl-PL" sz="1800" dirty="0">
-                <a:solidFill>
-                  <a:schemeClr val="tx1"/>
-                </a:solidFill>
-                <a:latin typeface="Times New Roman" panose="02020603050405020304" pitchFamily="18" charset="0"/>
-                <a:cs typeface="Times New Roman" panose="02020603050405020304" pitchFamily="18" charset="0"/>
-              </a:rPr>
-              <a:t>Na ocenę 3,0 </a:t>
-            </a:r>
-            <a:r>
-              <a:rPr lang="pl-PL" sz="1800" b="1" dirty="0">
-                <a:solidFill>
-                  <a:schemeClr val="tx1"/>
-                </a:solidFill>
-                <a:latin typeface="Times New Roman" panose="02020603050405020304" pitchFamily="18" charset="0"/>
-                <a:cs typeface="Times New Roman" panose="02020603050405020304" pitchFamily="18" charset="0"/>
-              </a:rPr>
-              <a:t>wymagana jest </a:t>
-            </a:r>
-            <a:r>
-              <a:rPr lang="pl-PL" sz="1800" dirty="0">
-                <a:solidFill>
-                  <a:schemeClr val="tx1"/>
-                </a:solidFill>
-                <a:latin typeface="Times New Roman" panose="02020603050405020304" pitchFamily="18" charset="0"/>
-                <a:cs typeface="Times New Roman" panose="02020603050405020304" pitchFamily="18" charset="0"/>
-              </a:rPr>
-              <a:t>średnia co najmniej 3,0.</a:t>
-            </a:r>
-          </a:p>
-          <a:p>
-            <a:pPr marL="285750" indent="-285750">
-              <a:lnSpc>
-                <a:spcPct val="150000"/>
-              </a:lnSpc>
-              <a:buFont typeface="Arial" panose="020B0604020202020204" pitchFamily="34" charset="0"/>
-              <a:buChar char="•"/>
-            </a:pPr>
-            <a:r>
-              <a:rPr lang="pl-PL" sz="1800" dirty="0">
-                <a:solidFill>
-                  <a:schemeClr val="tx1"/>
-                </a:solidFill>
-                <a:latin typeface="Times New Roman" panose="02020603050405020304" pitchFamily="18" charset="0"/>
-                <a:cs typeface="Times New Roman" panose="02020603050405020304" pitchFamily="18" charset="0"/>
-              </a:rPr>
-              <a:t>Na zajęciach laboratoryjnych dopuszczalne są </a:t>
-            </a:r>
-            <a:r>
-              <a:rPr lang="pl-PL" sz="1800" b="1" dirty="0">
-                <a:solidFill>
-                  <a:schemeClr val="tx1"/>
-                </a:solidFill>
-                <a:latin typeface="Times New Roman" panose="02020603050405020304" pitchFamily="18" charset="0"/>
-                <a:cs typeface="Times New Roman" panose="02020603050405020304" pitchFamily="18" charset="0"/>
-              </a:rPr>
-              <a:t>trzy nieobecności</a:t>
-            </a:r>
-            <a:r>
-              <a:rPr lang="pl-PL" sz="1800" dirty="0">
-                <a:solidFill>
-                  <a:schemeClr val="tx1"/>
-                </a:solidFill>
-                <a:latin typeface="Times New Roman" panose="02020603050405020304" pitchFamily="18" charset="0"/>
-                <a:cs typeface="Times New Roman" panose="02020603050405020304" pitchFamily="18" charset="0"/>
-              </a:rPr>
-              <a:t>.</a:t>
+              <a:t>podczas zajęć laboratoryjnych. Z każdej listy pytań (o ile istnieje) losowane są pytania. Liczba pytań jest zależna od liczby punktów na liście. Przykładowo, jeśli lista ma 10 punktów, a z zadań praktycznych student może otrzymać 5 punktów, losowane jest 5 pytań. Pytania dotyczą zarówno teorii jak i praktyki.</a:t>
             </a:r>
           </a:p>
         </p:txBody>
@@ -7067,7 +7034,13 @@
     </p:bg>
     <p:spTree>
       <p:nvGrpSpPr>
-        <p:cNvPr id="1" name=""/>
+        <p:cNvPr id="1" name="">
+          <a:extLst>
+            <a:ext uri="{FF2B5EF4-FFF2-40B4-BE49-F238E27FC236}">
+              <a16:creationId xmlns:a16="http://schemas.microsoft.com/office/drawing/2014/main" id="{D15A7B82-1038-CE67-BCBD-A5517ABF66D2}"/>
+            </a:ext>
+          </a:extLst>
+        </p:cNvPr>
         <p:cNvGrpSpPr/>
         <p:nvPr/>
       </p:nvGrpSpPr>
@@ -7081,7 +7054,13 @@
       </p:grpSpPr>
       <p:sp>
         <p:nvSpPr>
-          <p:cNvPr id="2" name="Rectangle 1"/>
+          <p:cNvPr id="2" name="Rectangle 1">
+            <a:extLst>
+              <a:ext uri="{FF2B5EF4-FFF2-40B4-BE49-F238E27FC236}">
+                <a16:creationId xmlns:a16="http://schemas.microsoft.com/office/drawing/2014/main" id="{93B68BD3-2D09-7AEF-5CB1-931C6B2420D4}"/>
+              </a:ext>
+            </a:extLst>
+          </p:cNvPr>
           <p:cNvSpPr/>
           <p:nvPr/>
         </p:nvSpPr>
@@ -7110,17 +7089,17 @@
                 <a:ea typeface="Verdana" panose="020B0604030504040204" pitchFamily="34" charset="0"/>
                 <a:cs typeface="Verdana" panose="020B0604030504040204" pitchFamily="34" charset="0"/>
               </a:rPr>
-              <a:t>Treści Programowe</a:t>
-            </a:r>
-          </a:p>
-        </p:txBody>
-      </p:sp>
-      <p:sp>
-        <p:nvSpPr>
-          <p:cNvPr id="7" name="pole tekstowe 6">
+              <a:t>ZASADY ZALICZENIA</a:t>
+            </a:r>
+          </a:p>
+        </p:txBody>
+      </p:sp>
+      <p:sp>
+        <p:nvSpPr>
+          <p:cNvPr id="5" name="TextBox 1">
             <a:extLst>
               <a:ext uri="{FF2B5EF4-FFF2-40B4-BE49-F238E27FC236}">
-                <a16:creationId xmlns:a16="http://schemas.microsoft.com/office/drawing/2014/main" id="{2F467DBE-3D30-473E-A461-81CA88D2033B}"/>
+                <a16:creationId xmlns:a16="http://schemas.microsoft.com/office/drawing/2014/main" id="{D3E6F67B-6A88-3F3F-EF6F-88D41FA3FF0C}"/>
               </a:ext>
             </a:extLst>
           </p:cNvPr>
@@ -7129,8 +7108,8 @@
         </p:nvSpPr>
         <p:spPr>
           <a:xfrm>
-            <a:off x="1187624" y="908720"/>
-            <a:ext cx="7956376" cy="5786199"/>
+            <a:off x="971600" y="681083"/>
+            <a:ext cx="8244408" cy="6275051"/>
           </a:xfrm>
           <a:prstGeom prst="rect">
             <a:avLst/>
@@ -7138,717 +7117,415 @@
           <a:noFill/>
         </p:spPr>
         <p:txBody>
-          <a:bodyPr wrap="square">
+          <a:bodyPr wrap="square" rtlCol="0">
             <a:spAutoFit/>
           </a:bodyPr>
           <a:lstStyle/>
           <a:p>
-            <a:pPr lvl="0">
-              <a:spcAft>
-                <a:spcPts val="600"/>
-              </a:spcAft>
-              <a:tabLst>
-                <a:tab pos="91440" algn="l"/>
-              </a:tabLst>
+            <a:pPr algn="just">
+              <a:lnSpc>
+                <a:spcPct val="150000"/>
+              </a:lnSpc>
             </a:pPr>
             <a:r>
-              <a:rPr lang="pl-PL" sz="1800" b="1" kern="150" dirty="0">
-                <a:solidFill>
-                  <a:schemeClr val="tx1"/>
-                </a:solidFill>
-                <a:effectLst/>
-                <a:latin typeface="+mj-lt"/>
-                <a:ea typeface="OpenSymbol"/>
-                <a:cs typeface="Verdana, Verdana"/>
-              </a:rPr>
-              <a:t>0.    </a:t>
-            </a:r>
-            <a:r>
-              <a:rPr lang="pl-PL" sz="2000" b="1" kern="150" dirty="0">
-                <a:solidFill>
-                  <a:schemeClr val="tx1"/>
-                </a:solidFill>
-                <a:effectLst/>
-                <a:latin typeface="+mj-lt"/>
-                <a:ea typeface="OpenSymbol"/>
-                <a:cs typeface="Verdana, Verdana"/>
-              </a:rPr>
-              <a:t>Wstęp</a:t>
-            </a:r>
-            <a:endParaRPr lang="pl-PL" sz="2000" kern="150" dirty="0">
-              <a:solidFill>
-                <a:schemeClr val="tx1"/>
-              </a:solidFill>
-              <a:effectLst/>
-              <a:latin typeface="+mj-lt"/>
-              <a:ea typeface="OpenSymbol"/>
-              <a:cs typeface="OpenSymbol"/>
-            </a:endParaRPr>
-          </a:p>
-          <a:p>
-            <a:pPr marL="342900" lvl="0" indent="-342900">
-              <a:spcAft>
-                <a:spcPts val="600"/>
-              </a:spcAft>
-              <a:buFont typeface="+mj-lt"/>
-              <a:buAutoNum type="arabicPeriod"/>
-              <a:tabLst>
-                <a:tab pos="91440" algn="l"/>
-              </a:tabLst>
+              <a:rPr lang="pl-PL" sz="1800" b="0" i="0" dirty="0">
+                <a:solidFill>
+                  <a:schemeClr val="tx1"/>
+                </a:solidFill>
+                <a:effectLst/>
+                <a:latin typeface="Times New Roman" panose="02020603050405020304" pitchFamily="18" charset="0"/>
+                <a:cs typeface="Times New Roman" panose="02020603050405020304" pitchFamily="18" charset="0"/>
+              </a:rPr>
+              <a:t>Warunkiem zaliczenia laboratorium jest uzyskanie pozytywnej oceny z list zadań.</a:t>
+            </a:r>
+          </a:p>
+          <a:p>
+            <a:pPr marL="285750" indent="-285750" algn="just">
+              <a:lnSpc>
+                <a:spcPct val="150000"/>
+              </a:lnSpc>
+              <a:buFont typeface="Arial" panose="020B0604020202020204" pitchFamily="34" charset="0"/>
+              <a:buChar char="•"/>
             </a:pPr>
             <a:r>
-              <a:rPr lang="pl-PL" sz="2000" b="1" kern="150" dirty="0">
-                <a:solidFill>
-                  <a:schemeClr val="tx1"/>
-                </a:solidFill>
-                <a:effectLst/>
-                <a:latin typeface="+mj-lt"/>
-                <a:ea typeface="OpenSymbol"/>
-                <a:cs typeface="Verdana, Verdana"/>
-              </a:rPr>
-              <a:t>Typy danych</a:t>
-            </a:r>
-            <a:r>
-              <a:rPr lang="pl-PL" sz="2000" kern="150" dirty="0">
-                <a:solidFill>
-                  <a:schemeClr val="tx1"/>
-                </a:solidFill>
-                <a:latin typeface="+mj-lt"/>
-                <a:ea typeface="OpenSymbol"/>
-                <a:cs typeface="Verdana, Verdana"/>
-              </a:rPr>
-              <a:t>, </a:t>
-            </a:r>
-            <a:r>
-              <a:rPr lang="pl-PL" sz="2000" b="1" kern="150" dirty="0">
-                <a:solidFill>
-                  <a:schemeClr val="tx1"/>
-                </a:solidFill>
-                <a:effectLst/>
-                <a:latin typeface="+mj-lt"/>
-                <a:ea typeface="OpenSymbol"/>
-                <a:cs typeface="Verdana, Verdana"/>
-              </a:rPr>
-              <a:t>Wyrażenia, Instrukcje, Pętle</a:t>
-            </a:r>
-            <a:endParaRPr lang="pl-PL" sz="2000" kern="150" dirty="0">
-              <a:solidFill>
-                <a:schemeClr val="tx1"/>
-              </a:solidFill>
-              <a:effectLst/>
-              <a:latin typeface="+mj-lt"/>
-              <a:ea typeface="OpenSymbol"/>
-              <a:cs typeface="OpenSymbol"/>
-            </a:endParaRPr>
-          </a:p>
-          <a:p>
-            <a:pPr marL="342900" lvl="0" indent="-342900">
-              <a:spcAft>
-                <a:spcPts val="600"/>
-              </a:spcAft>
-              <a:buFont typeface="+mj-lt"/>
-              <a:buAutoNum type="arabicPeriod"/>
-              <a:tabLst>
-                <a:tab pos="91440" algn="l"/>
-              </a:tabLst>
+              <a:rPr lang="pl-PL" sz="1800" b="0" i="0" dirty="0">
+                <a:solidFill>
+                  <a:schemeClr val="tx1"/>
+                </a:solidFill>
+                <a:effectLst/>
+                <a:latin typeface="Times New Roman" panose="02020603050405020304" pitchFamily="18" charset="0"/>
+                <a:cs typeface="Times New Roman" panose="02020603050405020304" pitchFamily="18" charset="0"/>
+              </a:rPr>
+              <a:t>Student jest </a:t>
+            </a:r>
+            <a:r>
+              <a:rPr lang="pl-PL" sz="1800" b="1" i="0" dirty="0">
+                <a:solidFill>
+                  <a:schemeClr val="tx1"/>
+                </a:solidFill>
+                <a:effectLst/>
+                <a:latin typeface="Times New Roman" panose="02020603050405020304" pitchFamily="18" charset="0"/>
+                <a:cs typeface="Times New Roman" panose="02020603050405020304" pitchFamily="18" charset="0"/>
+              </a:rPr>
+              <a:t>zobowiązany do przekazania kodu źródłowego </a:t>
+            </a:r>
+            <a:r>
+              <a:rPr lang="pl-PL" sz="1800" b="0" i="0" dirty="0">
+                <a:solidFill>
+                  <a:schemeClr val="tx1"/>
+                </a:solidFill>
+                <a:effectLst/>
+                <a:latin typeface="Times New Roman" panose="02020603050405020304" pitchFamily="18" charset="0"/>
+                <a:cs typeface="Times New Roman" panose="02020603050405020304" pitchFamily="18" charset="0"/>
+              </a:rPr>
+              <a:t>w repozytorium GitHub. Link do repozytorium należy podać jako odpowiedź na </a:t>
+            </a:r>
+            <a:r>
+              <a:rPr lang="pl-PL" sz="1800" b="1" i="0" dirty="0">
+                <a:solidFill>
+                  <a:schemeClr val="tx1"/>
+                </a:solidFill>
+                <a:effectLst/>
+                <a:latin typeface="Times New Roman" panose="02020603050405020304" pitchFamily="18" charset="0"/>
+                <a:cs typeface="Times New Roman" panose="02020603050405020304" pitchFamily="18" charset="0"/>
+              </a:rPr>
+              <a:t>zadanie na platformie MS </a:t>
+            </a:r>
+            <a:r>
+              <a:rPr lang="pl-PL" sz="1800" b="1" i="0" dirty="0" err="1">
+                <a:solidFill>
+                  <a:schemeClr val="tx1"/>
+                </a:solidFill>
+                <a:effectLst/>
+                <a:latin typeface="Times New Roman" panose="02020603050405020304" pitchFamily="18" charset="0"/>
+                <a:cs typeface="Times New Roman" panose="02020603050405020304" pitchFamily="18" charset="0"/>
+              </a:rPr>
+              <a:t>Teams</a:t>
+            </a:r>
+            <a:r>
+              <a:rPr lang="pl-PL" sz="1800" b="0" i="0" dirty="0">
+                <a:solidFill>
+                  <a:schemeClr val="tx1"/>
+                </a:solidFill>
+                <a:effectLst/>
+                <a:latin typeface="Times New Roman" panose="02020603050405020304" pitchFamily="18" charset="0"/>
+                <a:cs typeface="Times New Roman" panose="02020603050405020304" pitchFamily="18" charset="0"/>
+              </a:rPr>
+              <a:t>. Brak linku do repozytorium z rozwiązaniami zadań jest </a:t>
+            </a:r>
+            <a:r>
+              <a:rPr lang="pl-PL" sz="1800" b="1" i="0" dirty="0">
+                <a:solidFill>
+                  <a:schemeClr val="tx1"/>
+                </a:solidFill>
+                <a:effectLst/>
+                <a:latin typeface="Times New Roman" panose="02020603050405020304" pitchFamily="18" charset="0"/>
+                <a:cs typeface="Times New Roman" panose="02020603050405020304" pitchFamily="18" charset="0"/>
+              </a:rPr>
+              <a:t>równoznaczny z brakiem zaliczenia przedmiotu</a:t>
+            </a:r>
+            <a:r>
+              <a:rPr lang="pl-PL" sz="1800" b="0" i="0" dirty="0">
+                <a:solidFill>
+                  <a:schemeClr val="tx1"/>
+                </a:solidFill>
+                <a:effectLst/>
+                <a:latin typeface="Times New Roman" panose="02020603050405020304" pitchFamily="18" charset="0"/>
+                <a:cs typeface="Times New Roman" panose="02020603050405020304" pitchFamily="18" charset="0"/>
+              </a:rPr>
+              <a:t>.</a:t>
+            </a:r>
+          </a:p>
+          <a:p>
+            <a:pPr marL="285750" indent="-285750" algn="just">
+              <a:lnSpc>
+                <a:spcPct val="150000"/>
+              </a:lnSpc>
+              <a:buFont typeface="Arial" panose="020B0604020202020204" pitchFamily="34" charset="0"/>
+              <a:buChar char="•"/>
             </a:pPr>
             <a:r>
-              <a:rPr lang="pl-PL" sz="2000" b="1" kern="150" dirty="0" err="1">
-                <a:solidFill>
-                  <a:schemeClr val="tx1"/>
-                </a:solidFill>
-                <a:effectLst/>
-                <a:latin typeface="+mj-lt"/>
-                <a:ea typeface="OpenSymbol"/>
-                <a:cs typeface="Verdana, Verdana"/>
-              </a:rPr>
-              <a:t>Garbage</a:t>
-            </a:r>
-            <a:r>
-              <a:rPr lang="pl-PL" sz="2000" b="1" kern="150" dirty="0">
-                <a:solidFill>
-                  <a:schemeClr val="tx1"/>
-                </a:solidFill>
-                <a:effectLst/>
-                <a:latin typeface="+mj-lt"/>
-                <a:ea typeface="OpenSymbol"/>
-                <a:cs typeface="Verdana, Verdana"/>
-              </a:rPr>
-              <a:t> Collection</a:t>
-            </a:r>
-          </a:p>
-          <a:p>
-            <a:pPr marL="342900" lvl="0" indent="-342900">
-              <a:spcAft>
-                <a:spcPts val="600"/>
-              </a:spcAft>
-              <a:buFont typeface="+mj-lt"/>
-              <a:buAutoNum type="arabicPeriod"/>
-              <a:tabLst>
-                <a:tab pos="91440" algn="l"/>
-              </a:tabLst>
+              <a:rPr lang="pl-PL" sz="1800" b="0" i="0" dirty="0">
+                <a:solidFill>
+                  <a:schemeClr val="tx1"/>
+                </a:solidFill>
+                <a:effectLst/>
+                <a:latin typeface="Times New Roman" panose="02020603050405020304" pitchFamily="18" charset="0"/>
+                <a:cs typeface="Times New Roman" panose="02020603050405020304" pitchFamily="18" charset="0"/>
+              </a:rPr>
+              <a:t>Ocena końcowa jest </a:t>
+            </a:r>
+            <a:r>
+              <a:rPr lang="pl-PL" sz="1800" b="1" i="0" dirty="0">
+                <a:solidFill>
+                  <a:schemeClr val="tx1"/>
+                </a:solidFill>
+                <a:effectLst/>
+                <a:latin typeface="Times New Roman" panose="02020603050405020304" pitchFamily="18" charset="0"/>
+                <a:cs typeface="Times New Roman" panose="02020603050405020304" pitchFamily="18" charset="0"/>
+              </a:rPr>
+              <a:t>średnią arytmetyczną </a:t>
+            </a:r>
+            <a:r>
+              <a:rPr lang="pl-PL" sz="1800" b="0" i="0" dirty="0">
+                <a:solidFill>
+                  <a:schemeClr val="tx1"/>
+                </a:solidFill>
+                <a:effectLst/>
+                <a:latin typeface="Times New Roman" panose="02020603050405020304" pitchFamily="18" charset="0"/>
+                <a:cs typeface="Times New Roman" panose="02020603050405020304" pitchFamily="18" charset="0"/>
+              </a:rPr>
+              <a:t>ocen z list </a:t>
+            </a:r>
+          </a:p>
+          <a:p>
+            <a:pPr marL="742950" lvl="1" indent="-285750" algn="just">
+              <a:lnSpc>
+                <a:spcPct val="150000"/>
+              </a:lnSpc>
+              <a:buFont typeface="Arial" panose="020B0604020202020204" pitchFamily="34" charset="0"/>
+              <a:buChar char="•"/>
             </a:pPr>
             <a:r>
-              <a:rPr lang="pl-PL" sz="2000" b="1" kern="150" dirty="0">
-                <a:solidFill>
-                  <a:schemeClr val="tx1"/>
-                </a:solidFill>
-                <a:latin typeface="+mj-lt"/>
-                <a:ea typeface="OpenSymbol"/>
-                <a:cs typeface="OpenSymbol"/>
-              </a:rPr>
-              <a:t>Funkcje</a:t>
-            </a:r>
-          </a:p>
-          <a:p>
-            <a:pPr marL="342900" lvl="0" indent="-342900">
-              <a:spcAft>
-                <a:spcPts val="600"/>
-              </a:spcAft>
-              <a:buFont typeface="+mj-lt"/>
-              <a:buAutoNum type="arabicPeriod"/>
-              <a:tabLst>
-                <a:tab pos="91440" algn="l"/>
-              </a:tabLst>
+              <a:rPr lang="pl-PL" sz="1800" dirty="0">
+                <a:solidFill>
+                  <a:schemeClr val="tx1"/>
+                </a:solidFill>
+                <a:latin typeface="Times New Roman" panose="02020603050405020304" pitchFamily="18" charset="0"/>
+                <a:cs typeface="Times New Roman" panose="02020603050405020304" pitchFamily="18" charset="0"/>
+              </a:rPr>
+              <a:t>Ocena 3,0 – średnia 3,0 – 3,24</a:t>
+            </a:r>
+          </a:p>
+          <a:p>
+            <a:pPr marL="742950" lvl="1" indent="-285750" algn="just">
+              <a:lnSpc>
+                <a:spcPct val="150000"/>
+              </a:lnSpc>
+              <a:buFont typeface="Arial" panose="020B0604020202020204" pitchFamily="34" charset="0"/>
+              <a:buChar char="•"/>
             </a:pPr>
             <a:r>
-              <a:rPr lang="pl-PL" sz="2000" b="1" kern="150" dirty="0">
-                <a:solidFill>
-                  <a:schemeClr val="tx1"/>
-                </a:solidFill>
-                <a:effectLst/>
-                <a:latin typeface="+mj-lt"/>
-                <a:ea typeface="OpenSymbol"/>
-                <a:cs typeface="OpenSymbol"/>
-              </a:rPr>
-              <a:t>Kolekcje</a:t>
-            </a:r>
-          </a:p>
-          <a:p>
-            <a:pPr marL="342900" lvl="0" indent="-342900">
-              <a:spcAft>
-                <a:spcPts val="600"/>
-              </a:spcAft>
-              <a:buFont typeface="+mj-lt"/>
-              <a:buAutoNum type="arabicPeriod"/>
-              <a:tabLst>
-                <a:tab pos="91440" algn="l"/>
-              </a:tabLst>
+              <a:rPr lang="pl-PL" sz="1800" b="0" i="0" dirty="0">
+                <a:solidFill>
+                  <a:schemeClr val="tx1"/>
+                </a:solidFill>
+                <a:effectLst/>
+                <a:latin typeface="Times New Roman" panose="02020603050405020304" pitchFamily="18" charset="0"/>
+                <a:cs typeface="Times New Roman" panose="02020603050405020304" pitchFamily="18" charset="0"/>
+              </a:rPr>
+              <a:t>Ocena 3,5 – średnia 3,25 – 3,74</a:t>
+            </a:r>
+          </a:p>
+          <a:p>
+            <a:pPr marL="742950" lvl="1" indent="-285750" algn="just">
+              <a:lnSpc>
+                <a:spcPct val="150000"/>
+              </a:lnSpc>
+              <a:buFont typeface="Arial" panose="020B0604020202020204" pitchFamily="34" charset="0"/>
+              <a:buChar char="•"/>
             </a:pPr>
             <a:r>
-              <a:rPr lang="pl-PL" sz="2000" b="1" kern="150" dirty="0">
-                <a:solidFill>
-                  <a:schemeClr val="tx1"/>
-                </a:solidFill>
-                <a:latin typeface="+mj-lt"/>
-                <a:ea typeface="OpenSymbol"/>
-                <a:cs typeface="OpenSymbol"/>
-              </a:rPr>
-              <a:t>Klasy</a:t>
-            </a:r>
-          </a:p>
-          <a:p>
-            <a:pPr marL="342900" lvl="0" indent="-342900">
-              <a:spcAft>
-                <a:spcPts val="600"/>
-              </a:spcAft>
-              <a:buFont typeface="+mj-lt"/>
-              <a:buAutoNum type="arabicPeriod"/>
-              <a:tabLst>
-                <a:tab pos="91440" algn="l"/>
-              </a:tabLst>
+              <a:rPr lang="pl-PL" sz="1800" dirty="0">
+                <a:solidFill>
+                  <a:schemeClr val="tx1"/>
+                </a:solidFill>
+                <a:latin typeface="Times New Roman" panose="02020603050405020304" pitchFamily="18" charset="0"/>
+                <a:cs typeface="Times New Roman" panose="02020603050405020304" pitchFamily="18" charset="0"/>
+              </a:rPr>
+              <a:t>Ocena 4,0 – średnia 3,75 – 4,24</a:t>
+            </a:r>
+          </a:p>
+          <a:p>
+            <a:pPr marL="742950" lvl="1" indent="-285750" algn="just">
+              <a:lnSpc>
+                <a:spcPct val="150000"/>
+              </a:lnSpc>
+              <a:buFont typeface="Arial" panose="020B0604020202020204" pitchFamily="34" charset="0"/>
+              <a:buChar char="•"/>
             </a:pPr>
             <a:r>
-              <a:rPr lang="pl-PL" sz="2000" b="1" kern="150" dirty="0">
-                <a:solidFill>
-                  <a:schemeClr val="tx1"/>
-                </a:solidFill>
-                <a:effectLst/>
-                <a:latin typeface="+mj-lt"/>
-                <a:ea typeface="OpenSymbol"/>
-                <a:cs typeface="OpenSymbol"/>
-              </a:rPr>
-              <a:t>O</a:t>
-            </a:r>
-            <a:r>
-              <a:rPr lang="pl-PL" sz="2000" b="1" kern="150" dirty="0">
-                <a:solidFill>
-                  <a:schemeClr val="tx1"/>
-                </a:solidFill>
-                <a:latin typeface="+mj-lt"/>
-                <a:ea typeface="OpenSymbol"/>
-                <a:cs typeface="OpenSymbol"/>
-              </a:rPr>
-              <a:t>biekty i Interfejsy</a:t>
-            </a:r>
-          </a:p>
-          <a:p>
-            <a:pPr marL="342900" lvl="0" indent="-342900">
-              <a:spcAft>
-                <a:spcPts val="600"/>
-              </a:spcAft>
-              <a:buFont typeface="+mj-lt"/>
-              <a:buAutoNum type="arabicPeriod"/>
-              <a:tabLst>
-                <a:tab pos="91440" algn="l"/>
-              </a:tabLst>
+              <a:rPr lang="pl-PL" sz="1800" b="0" i="0" dirty="0">
+                <a:solidFill>
+                  <a:schemeClr val="tx1"/>
+                </a:solidFill>
+                <a:effectLst/>
+                <a:latin typeface="Times New Roman" panose="02020603050405020304" pitchFamily="18" charset="0"/>
+                <a:cs typeface="Times New Roman" panose="02020603050405020304" pitchFamily="18" charset="0"/>
+              </a:rPr>
+              <a:t>Ocena 4,5 – średnia 4,25 – 4,7</a:t>
+            </a:r>
+            <a:r>
+              <a:rPr lang="pl-PL" sz="1800" dirty="0">
+                <a:solidFill>
+                  <a:schemeClr val="tx1"/>
+                </a:solidFill>
+                <a:latin typeface="Times New Roman" panose="02020603050405020304" pitchFamily="18" charset="0"/>
+                <a:cs typeface="Times New Roman" panose="02020603050405020304" pitchFamily="18" charset="0"/>
+              </a:rPr>
+              <a:t>4</a:t>
+            </a:r>
+          </a:p>
+          <a:p>
+            <a:pPr marL="742950" lvl="1" indent="-285750" algn="just">
+              <a:lnSpc>
+                <a:spcPct val="150000"/>
+              </a:lnSpc>
+              <a:buFont typeface="Arial" panose="020B0604020202020204" pitchFamily="34" charset="0"/>
+              <a:buChar char="•"/>
             </a:pPr>
             <a:r>
-              <a:rPr lang="pl-PL" sz="2000" b="1" kern="150" dirty="0">
-                <a:solidFill>
-                  <a:schemeClr val="tx1"/>
-                </a:solidFill>
-                <a:effectLst/>
-                <a:latin typeface="+mj-lt"/>
-                <a:ea typeface="OpenSymbol"/>
-                <a:cs typeface="OpenSymbol"/>
-              </a:rPr>
-              <a:t>Inicjalizacja i Delegacja</a:t>
-            </a:r>
-          </a:p>
-          <a:p>
-            <a:pPr marL="342900" lvl="0" indent="-342900">
-              <a:spcAft>
-                <a:spcPts val="600"/>
-              </a:spcAft>
-              <a:buFont typeface="+mj-lt"/>
-              <a:buAutoNum type="arabicPeriod"/>
-              <a:tabLst>
-                <a:tab pos="91440" algn="l"/>
-              </a:tabLst>
+              <a:rPr lang="pl-PL" sz="1800" b="0" i="0" dirty="0">
+                <a:solidFill>
+                  <a:schemeClr val="tx1"/>
+                </a:solidFill>
+                <a:effectLst/>
+                <a:latin typeface="Times New Roman" panose="02020603050405020304" pitchFamily="18" charset="0"/>
+                <a:cs typeface="Times New Roman" panose="02020603050405020304" pitchFamily="18" charset="0"/>
+              </a:rPr>
+              <a:t>Ocena 5,0 – średnia 4,75 – 5,0</a:t>
+            </a:r>
+          </a:p>
+          <a:p>
+            <a:pPr marL="285750" indent="-285750" algn="just">
+              <a:lnSpc>
+                <a:spcPct val="150000"/>
+              </a:lnSpc>
+              <a:buFont typeface="Arial" panose="020B0604020202020204" pitchFamily="34" charset="0"/>
+              <a:buChar char="•"/>
             </a:pPr>
             <a:r>
-              <a:rPr lang="pl-PL" sz="2000" b="1" kern="150" dirty="0">
-                <a:solidFill>
-                  <a:schemeClr val="tx1"/>
-                </a:solidFill>
-                <a:latin typeface="+mj-lt"/>
-                <a:ea typeface="OpenSymbol"/>
-                <a:cs typeface="OpenSymbol"/>
-              </a:rPr>
-              <a:t>Fundamenty Aplikacji. Aktywność, Cykl Życia. </a:t>
-            </a:r>
-            <a:r>
-              <a:rPr lang="pl-PL" sz="2000" b="1" kern="150" dirty="0" err="1">
-                <a:solidFill>
-                  <a:schemeClr val="tx1"/>
-                </a:solidFill>
-                <a:latin typeface="+mj-lt"/>
-                <a:ea typeface="OpenSymbol"/>
-                <a:cs typeface="OpenSymbol"/>
-              </a:rPr>
-              <a:t>Jetpack</a:t>
-            </a:r>
-            <a:r>
-              <a:rPr lang="pl-PL" sz="2000" b="1" kern="150" dirty="0">
-                <a:solidFill>
-                  <a:schemeClr val="tx1"/>
-                </a:solidFill>
-                <a:latin typeface="+mj-lt"/>
-                <a:ea typeface="OpenSymbol"/>
-                <a:cs typeface="OpenSymbol"/>
+              <a:rPr lang="pl-PL" sz="1800" b="0" i="0" dirty="0">
+                <a:solidFill>
+                  <a:schemeClr val="tx1"/>
+                </a:solidFill>
+                <a:effectLst/>
+                <a:latin typeface="Times New Roman" panose="02020603050405020304" pitchFamily="18" charset="0"/>
+                <a:cs typeface="Times New Roman" panose="02020603050405020304" pitchFamily="18" charset="0"/>
+              </a:rPr>
+              <a:t>Dopuszczalne są </a:t>
+            </a:r>
+            <a:r>
+              <a:rPr lang="pl-PL" sz="1800" b="1" i="0" dirty="0">
+                <a:solidFill>
+                  <a:schemeClr val="tx1"/>
+                </a:solidFill>
+                <a:effectLst/>
+                <a:latin typeface="Times New Roman" panose="02020603050405020304" pitchFamily="18" charset="0"/>
+                <a:cs typeface="Times New Roman" panose="02020603050405020304" pitchFamily="18" charset="0"/>
+              </a:rPr>
+              <a:t>trzy nieobecności </a:t>
+            </a:r>
+            <a:r>
+              <a:rPr lang="pl-PL" sz="1800" i="0" dirty="0">
+                <a:solidFill>
+                  <a:schemeClr val="tx1"/>
+                </a:solidFill>
+                <a:effectLst/>
+                <a:latin typeface="Times New Roman" panose="02020603050405020304" pitchFamily="18" charset="0"/>
+                <a:cs typeface="Times New Roman" panose="02020603050405020304" pitchFamily="18" charset="0"/>
+              </a:rPr>
+              <a:t>nieusprawiedliwione</a:t>
+            </a:r>
+            <a:r>
+              <a:rPr lang="pl-PL" sz="1800" b="1" i="0" dirty="0">
+                <a:solidFill>
+                  <a:schemeClr val="tx1"/>
+                </a:solidFill>
+                <a:effectLst/>
+                <a:latin typeface="Times New Roman" panose="02020603050405020304" pitchFamily="18" charset="0"/>
+                <a:cs typeface="Times New Roman" panose="02020603050405020304" pitchFamily="18" charset="0"/>
               </a:rPr>
               <a:t> </a:t>
             </a:r>
             <a:r>
-              <a:rPr lang="pl-PL" sz="2000" b="1" kern="150" dirty="0" err="1">
-                <a:solidFill>
-                  <a:schemeClr val="tx1"/>
-                </a:solidFill>
-                <a:latin typeface="+mj-lt"/>
-                <a:ea typeface="OpenSymbol"/>
-                <a:cs typeface="OpenSymbol"/>
-              </a:rPr>
-              <a:t>Compose</a:t>
-            </a:r>
-            <a:endParaRPr lang="pl-PL" sz="2000" b="1" kern="150" dirty="0">
-              <a:solidFill>
-                <a:schemeClr val="tx1"/>
-              </a:solidFill>
-              <a:latin typeface="+mj-lt"/>
-              <a:ea typeface="OpenSymbol"/>
-              <a:cs typeface="OpenSymbol"/>
-            </a:endParaRPr>
-          </a:p>
-          <a:p>
-            <a:pPr marL="342900" lvl="0" indent="-342900">
-              <a:spcAft>
-                <a:spcPts val="600"/>
-              </a:spcAft>
-              <a:buFont typeface="+mj-lt"/>
-              <a:buAutoNum type="arabicPeriod"/>
-              <a:tabLst>
-                <a:tab pos="91440" algn="l"/>
-              </a:tabLst>
+              <a:rPr lang="pl-PL" sz="1800" b="0" i="0" dirty="0">
+                <a:solidFill>
+                  <a:schemeClr val="tx1"/>
+                </a:solidFill>
+                <a:effectLst/>
+                <a:latin typeface="Times New Roman" panose="02020603050405020304" pitchFamily="18" charset="0"/>
+                <a:cs typeface="Times New Roman" panose="02020603050405020304" pitchFamily="18" charset="0"/>
+              </a:rPr>
+              <a:t>na zajęciach laboratoryjnych. Przy czwartej nieobecności automatycznie wstawiany jest status </a:t>
+            </a:r>
+            <a:r>
+              <a:rPr lang="pl-PL" sz="1800" b="1" i="0" dirty="0">
+                <a:solidFill>
+                  <a:schemeClr val="tx1"/>
+                </a:solidFill>
+                <a:effectLst/>
+                <a:latin typeface="Times New Roman" panose="02020603050405020304" pitchFamily="18" charset="0"/>
+                <a:cs typeface="Times New Roman" panose="02020603050405020304" pitchFamily="18" charset="0"/>
+              </a:rPr>
+              <a:t>nieklasyfikowany.</a:t>
+            </a:r>
+          </a:p>
+          <a:p>
+            <a:pPr marL="285750" indent="-285750" algn="just">
+              <a:lnSpc>
+                <a:spcPct val="150000"/>
+              </a:lnSpc>
+              <a:buFont typeface="Arial" panose="020B0604020202020204" pitchFamily="34" charset="0"/>
+              <a:buChar char="•"/>
             </a:pPr>
             <a:r>
-              <a:rPr lang="pl-PL" sz="2000" b="1" kern="150" dirty="0">
-                <a:solidFill>
-                  <a:schemeClr val="tx1"/>
-                </a:solidFill>
-                <a:effectLst/>
-                <a:latin typeface="+mj-lt"/>
-                <a:ea typeface="OpenSymbol"/>
-                <a:cs typeface="OpenSymbol"/>
-              </a:rPr>
-              <a:t>Podstawy </a:t>
-            </a:r>
-            <a:r>
-              <a:rPr lang="pl-PL" sz="2000" b="1" kern="150" dirty="0" err="1">
-                <a:solidFill>
-                  <a:schemeClr val="tx1"/>
-                </a:solidFill>
-                <a:effectLst/>
-                <a:latin typeface="+mj-lt"/>
-                <a:ea typeface="OpenSymbol"/>
-                <a:cs typeface="OpenSymbol"/>
-              </a:rPr>
-              <a:t>Tworzanie</a:t>
-            </a:r>
-            <a:r>
-              <a:rPr lang="pl-PL" sz="2000" b="1" kern="150" dirty="0">
-                <a:solidFill>
-                  <a:schemeClr val="tx1"/>
-                </a:solidFill>
-                <a:effectLst/>
-                <a:latin typeface="+mj-lt"/>
-                <a:ea typeface="OpenSymbol"/>
-                <a:cs typeface="OpenSymbol"/>
-              </a:rPr>
-              <a:t> UI, Kompozycja, </a:t>
-            </a:r>
-            <a:r>
-              <a:rPr lang="pl-PL" sz="2000" b="1" kern="150" dirty="0" err="1">
-                <a:solidFill>
-                  <a:schemeClr val="tx1"/>
-                </a:solidFill>
-                <a:effectLst/>
-                <a:latin typeface="+mj-lt"/>
-                <a:ea typeface="OpenSymbol"/>
-                <a:cs typeface="OpenSymbol"/>
-              </a:rPr>
-              <a:t>Rekompozycja</a:t>
-            </a:r>
-            <a:r>
-              <a:rPr lang="pl-PL" sz="2000" b="1" kern="150" dirty="0">
-                <a:solidFill>
-                  <a:schemeClr val="tx1"/>
-                </a:solidFill>
-                <a:effectLst/>
-                <a:latin typeface="+mj-lt"/>
-                <a:ea typeface="OpenSymbol"/>
-                <a:cs typeface="OpenSymbol"/>
-              </a:rPr>
-              <a:t>, Stan</a:t>
-            </a:r>
-          </a:p>
-          <a:p>
-            <a:pPr marL="342900" lvl="0" indent="-342900">
-              <a:spcAft>
-                <a:spcPts val="600"/>
-              </a:spcAft>
-              <a:buFont typeface="+mj-lt"/>
-              <a:buAutoNum type="arabicPeriod"/>
-              <a:tabLst>
-                <a:tab pos="91440" algn="l"/>
-              </a:tabLst>
-            </a:pPr>
-            <a:r>
-              <a:rPr lang="pl-PL" sz="2000" b="1" kern="150" dirty="0">
-                <a:solidFill>
-                  <a:schemeClr val="tx1"/>
-                </a:solidFill>
-                <a:effectLst/>
-                <a:latin typeface="+mj-lt"/>
-                <a:ea typeface="OpenSymbol"/>
-                <a:cs typeface="OpenSymbol"/>
-              </a:rPr>
-              <a:t>Elementy Struktury UI, </a:t>
-            </a:r>
-            <a:r>
-              <a:rPr lang="pl-PL" sz="2000" b="1" kern="150" dirty="0" err="1">
-                <a:solidFill>
-                  <a:schemeClr val="tx1"/>
-                </a:solidFill>
-                <a:effectLst/>
-                <a:latin typeface="+mj-lt"/>
-                <a:ea typeface="OpenSymbol"/>
-                <a:cs typeface="OpenSymbol"/>
-              </a:rPr>
-              <a:t>Scaffold</a:t>
-            </a:r>
-            <a:r>
-              <a:rPr lang="pl-PL" sz="2000" b="1" kern="150" dirty="0">
-                <a:solidFill>
-                  <a:schemeClr val="tx1"/>
-                </a:solidFill>
-                <a:effectLst/>
-                <a:latin typeface="+mj-lt"/>
-                <a:ea typeface="OpenSymbol"/>
-                <a:cs typeface="OpenSymbol"/>
-              </a:rPr>
-              <a:t>, Obsługa Kolekcji</a:t>
-            </a:r>
-          </a:p>
-          <a:p>
-            <a:pPr marL="342900" lvl="0" indent="-342900">
-              <a:spcAft>
-                <a:spcPts val="600"/>
-              </a:spcAft>
-              <a:buFont typeface="+mj-lt"/>
-              <a:buAutoNum type="arabicPeriod"/>
-              <a:tabLst>
-                <a:tab pos="91440" algn="l"/>
-              </a:tabLst>
-            </a:pPr>
-            <a:r>
-              <a:rPr lang="pl-PL" sz="2000" b="1" kern="150" dirty="0">
-                <a:solidFill>
-                  <a:schemeClr val="bg1">
-                    <a:lumMod val="65000"/>
-                  </a:schemeClr>
-                </a:solidFill>
-                <a:latin typeface="+mj-lt"/>
-                <a:ea typeface="OpenSymbol"/>
-                <a:cs typeface="OpenSymbol"/>
-              </a:rPr>
-              <a:t>Nawigacja w Aplikacji. </a:t>
-            </a:r>
-            <a:r>
-              <a:rPr lang="pl-PL" sz="2000" b="1" kern="150" dirty="0" err="1">
-                <a:solidFill>
-                  <a:schemeClr val="bg1">
-                    <a:lumMod val="65000"/>
-                  </a:schemeClr>
-                </a:solidFill>
-                <a:latin typeface="+mj-lt"/>
-                <a:ea typeface="OpenSymbol"/>
-                <a:cs typeface="OpenSymbol"/>
-              </a:rPr>
-              <a:t>Compose</a:t>
-            </a:r>
-            <a:r>
-              <a:rPr lang="pl-PL" sz="2000" b="1" kern="150" dirty="0">
-                <a:solidFill>
-                  <a:schemeClr val="bg1">
-                    <a:lumMod val="65000"/>
-                  </a:schemeClr>
-                </a:solidFill>
-                <a:latin typeface="+mj-lt"/>
-                <a:ea typeface="OpenSymbol"/>
-                <a:cs typeface="OpenSymbol"/>
-              </a:rPr>
-              <a:t> </a:t>
-            </a:r>
-            <a:r>
-              <a:rPr lang="pl-PL" sz="2000" b="1" kern="150" dirty="0" err="1">
-                <a:solidFill>
-                  <a:schemeClr val="bg1">
-                    <a:lumMod val="65000"/>
-                  </a:schemeClr>
-                </a:solidFill>
-                <a:latin typeface="+mj-lt"/>
-                <a:ea typeface="OpenSymbol"/>
-                <a:cs typeface="OpenSymbol"/>
-              </a:rPr>
-              <a:t>Navigation</a:t>
-            </a:r>
-            <a:r>
-              <a:rPr lang="pl-PL" sz="2000" b="1" kern="150" dirty="0">
-                <a:solidFill>
-                  <a:schemeClr val="bg1">
-                    <a:lumMod val="65000"/>
-                  </a:schemeClr>
-                </a:solidFill>
-                <a:latin typeface="+mj-lt"/>
-                <a:ea typeface="OpenSymbol"/>
-                <a:cs typeface="OpenSymbol"/>
-              </a:rPr>
-              <a:t>, </a:t>
-            </a:r>
-            <a:r>
-              <a:rPr lang="pl-PL" sz="2000" b="1" kern="150" dirty="0" err="1">
-                <a:solidFill>
-                  <a:schemeClr val="bg1">
-                    <a:lumMod val="65000"/>
-                  </a:schemeClr>
-                </a:solidFill>
-                <a:latin typeface="+mj-lt"/>
-                <a:ea typeface="OpenSymbol"/>
-                <a:cs typeface="OpenSymbol"/>
-              </a:rPr>
-              <a:t>Tab</a:t>
-            </a:r>
-            <a:r>
-              <a:rPr lang="pl-PL" sz="2000" b="1" kern="150" dirty="0">
-                <a:solidFill>
-                  <a:schemeClr val="bg1">
-                    <a:lumMod val="65000"/>
-                  </a:schemeClr>
-                </a:solidFill>
-                <a:latin typeface="+mj-lt"/>
-                <a:ea typeface="OpenSymbol"/>
-                <a:cs typeface="OpenSymbol"/>
-              </a:rPr>
-              <a:t> </a:t>
-            </a:r>
-            <a:r>
-              <a:rPr lang="pl-PL" sz="2000" b="1" kern="150" dirty="0" err="1">
-                <a:solidFill>
-                  <a:schemeClr val="bg1">
-                    <a:lumMod val="65000"/>
-                  </a:schemeClr>
-                </a:solidFill>
-                <a:latin typeface="+mj-lt"/>
-                <a:ea typeface="OpenSymbol"/>
-                <a:cs typeface="OpenSymbol"/>
-              </a:rPr>
-              <a:t>Navigation</a:t>
-            </a:r>
-            <a:r>
-              <a:rPr lang="pl-PL" sz="2000" b="1" kern="150" dirty="0">
-                <a:solidFill>
-                  <a:schemeClr val="bg1">
-                    <a:lumMod val="65000"/>
-                  </a:schemeClr>
-                </a:solidFill>
-                <a:latin typeface="+mj-lt"/>
-                <a:ea typeface="OpenSymbol"/>
-                <a:cs typeface="OpenSymbol"/>
-              </a:rPr>
-              <a:t>, </a:t>
-            </a:r>
-            <a:r>
-              <a:rPr lang="pl-PL" sz="2000" b="1" kern="150" dirty="0" err="1">
-                <a:solidFill>
-                  <a:schemeClr val="bg1">
-                    <a:lumMod val="65000"/>
-                  </a:schemeClr>
-                </a:solidFill>
-                <a:latin typeface="+mj-lt"/>
-                <a:ea typeface="OpenSymbol"/>
-                <a:cs typeface="OpenSymbol"/>
-              </a:rPr>
-              <a:t>Drawer</a:t>
-            </a:r>
-            <a:endParaRPr lang="pl-PL" sz="2000" b="1" kern="150" dirty="0">
-              <a:solidFill>
-                <a:schemeClr val="bg1">
-                  <a:lumMod val="65000"/>
-                </a:schemeClr>
-              </a:solidFill>
-              <a:latin typeface="+mj-lt"/>
-              <a:ea typeface="OpenSymbol"/>
-              <a:cs typeface="OpenSymbol"/>
-            </a:endParaRPr>
-          </a:p>
-          <a:p>
-            <a:pPr marL="342900" lvl="0" indent="-342900">
-              <a:spcAft>
-                <a:spcPts val="600"/>
-              </a:spcAft>
-              <a:buFont typeface="+mj-lt"/>
-              <a:buAutoNum type="arabicPeriod"/>
-              <a:tabLst>
-                <a:tab pos="91440" algn="l"/>
-              </a:tabLst>
-            </a:pPr>
-            <a:r>
-              <a:rPr lang="pl-PL" sz="2000" b="1" kern="150" dirty="0">
-                <a:solidFill>
-                  <a:schemeClr val="bg1">
-                    <a:lumMod val="65000"/>
-                  </a:schemeClr>
-                </a:solidFill>
-                <a:effectLst/>
-                <a:latin typeface="+mj-lt"/>
-                <a:ea typeface="OpenSymbol"/>
-                <a:cs typeface="OpenSymbol"/>
-              </a:rPr>
-              <a:t>Wzorce Projekt</a:t>
-            </a:r>
-            <a:r>
-              <a:rPr lang="pl-PL" sz="2000" b="1" kern="150" dirty="0">
-                <a:solidFill>
-                  <a:schemeClr val="bg1">
-                    <a:lumMod val="65000"/>
-                  </a:schemeClr>
-                </a:solidFill>
-                <a:latin typeface="+mj-lt"/>
-                <a:ea typeface="OpenSymbol"/>
-                <a:cs typeface="OpenSymbol"/>
-              </a:rPr>
-              <a:t>owe</a:t>
-            </a:r>
-          </a:p>
-          <a:p>
-            <a:pPr marL="342900" lvl="0" indent="-342900">
-              <a:spcAft>
-                <a:spcPts val="600"/>
-              </a:spcAft>
-              <a:buFont typeface="+mj-lt"/>
-              <a:buAutoNum type="arabicPeriod"/>
-              <a:tabLst>
-                <a:tab pos="91440" algn="l"/>
-              </a:tabLst>
-            </a:pPr>
-            <a:r>
-              <a:rPr lang="pl-PL" sz="2000" b="1" kern="150" dirty="0">
-                <a:solidFill>
-                  <a:schemeClr val="bg1">
-                    <a:lumMod val="65000"/>
-                  </a:schemeClr>
-                </a:solidFill>
-                <a:effectLst/>
-                <a:latin typeface="+mj-lt"/>
-                <a:ea typeface="OpenSymbol"/>
-                <a:cs typeface="OpenSymbol"/>
-              </a:rPr>
-              <a:t>Powiadomienia i Upoważnienia w Aplikacji</a:t>
-            </a:r>
-          </a:p>
-          <a:p>
-            <a:pPr marL="342900" lvl="0" indent="-342900">
-              <a:spcAft>
-                <a:spcPts val="600"/>
-              </a:spcAft>
-              <a:buFont typeface="+mj-lt"/>
-              <a:buAutoNum type="arabicPeriod"/>
-              <a:tabLst>
-                <a:tab pos="91440" algn="l"/>
-              </a:tabLst>
-            </a:pPr>
-            <a:r>
-              <a:rPr lang="pl-PL" sz="2000" b="1" kern="150" dirty="0" err="1">
-                <a:solidFill>
-                  <a:schemeClr val="bg1">
-                    <a:lumMod val="65000"/>
-                  </a:schemeClr>
-                </a:solidFill>
-                <a:latin typeface="+mj-lt"/>
-                <a:ea typeface="OpenSymbol"/>
-                <a:cs typeface="OpenSymbol"/>
-              </a:rPr>
-              <a:t>Widgety</a:t>
-            </a:r>
-            <a:endParaRPr lang="pl-PL" sz="2000" b="1" kern="150" dirty="0">
-              <a:solidFill>
-                <a:schemeClr val="bg1">
-                  <a:lumMod val="65000"/>
-                </a:schemeClr>
-              </a:solidFill>
-              <a:effectLst/>
-              <a:latin typeface="+mj-lt"/>
-              <a:ea typeface="OpenSymbol"/>
-              <a:cs typeface="OpenSymbol"/>
-            </a:endParaRPr>
+              <a:rPr lang="pl-PL" sz="1800" dirty="0">
+                <a:solidFill>
+                  <a:schemeClr val="tx1"/>
+                </a:solidFill>
+                <a:latin typeface="Times New Roman" panose="02020603050405020304" pitchFamily="18" charset="0"/>
+                <a:cs typeface="Times New Roman" panose="02020603050405020304" pitchFamily="18" charset="0"/>
+              </a:rPr>
+              <a:t>Oceny i punktacja jest </a:t>
+            </a:r>
+            <a:r>
+              <a:rPr lang="pl-PL" sz="1800" b="1" dirty="0">
+                <a:solidFill>
+                  <a:schemeClr val="tx1"/>
+                </a:solidFill>
+                <a:latin typeface="Times New Roman" panose="02020603050405020304" pitchFamily="18" charset="0"/>
+                <a:cs typeface="Times New Roman" panose="02020603050405020304" pitchFamily="18" charset="0"/>
+              </a:rPr>
+              <a:t>dostępna na bieżąco </a:t>
+            </a:r>
+            <a:r>
+              <a:rPr lang="pl-PL" sz="1800" dirty="0">
+                <a:solidFill>
+                  <a:schemeClr val="tx1"/>
+                </a:solidFill>
+                <a:latin typeface="Times New Roman" panose="02020603050405020304" pitchFamily="18" charset="0"/>
+                <a:cs typeface="Times New Roman" panose="02020603050405020304" pitchFamily="18" charset="0"/>
+              </a:rPr>
+              <a:t>w pliku na platformie MS </a:t>
+            </a:r>
+            <a:r>
+              <a:rPr lang="pl-PL" sz="1800" dirty="0" err="1">
+                <a:solidFill>
+                  <a:schemeClr val="tx1"/>
+                </a:solidFill>
+                <a:latin typeface="Times New Roman" panose="02020603050405020304" pitchFamily="18" charset="0"/>
+                <a:cs typeface="Times New Roman" panose="02020603050405020304" pitchFamily="18" charset="0"/>
+              </a:rPr>
+              <a:t>Teams</a:t>
+            </a:r>
+            <a:r>
+              <a:rPr lang="pl-PL" sz="1800" dirty="0">
+                <a:solidFill>
+                  <a:schemeClr val="tx1"/>
+                </a:solidFill>
+                <a:latin typeface="Times New Roman" panose="02020603050405020304" pitchFamily="18" charset="0"/>
+                <a:cs typeface="Times New Roman" panose="02020603050405020304" pitchFamily="18" charset="0"/>
+              </a:rPr>
+              <a:t>.</a:t>
+            </a:r>
           </a:p>
         </p:txBody>
       </p:sp>
     </p:spTree>
     <p:extLst>
       <p:ext uri="{BB962C8B-B14F-4D97-AF65-F5344CB8AC3E}">
-        <p14:creationId xmlns:p14="http://schemas.microsoft.com/office/powerpoint/2010/main" val="4009683948"/>
+        <p14:creationId xmlns:p14="http://schemas.microsoft.com/office/powerpoint/2010/main" val="490812435"/>
       </p:ext>
     </p:extLst>
   </p:cSld>
@@ -7918,17 +7595,17 @@
                 <a:ea typeface="Verdana" panose="020B0604030504040204" pitchFamily="34" charset="0"/>
                 <a:cs typeface="Verdana" panose="020B0604030504040204" pitchFamily="34" charset="0"/>
               </a:rPr>
-              <a:t>Kotlin – Język Przemysłowy</a:t>
-            </a:r>
-          </a:p>
-        </p:txBody>
-      </p:sp>
-      <p:sp>
-        <p:nvSpPr>
-          <p:cNvPr id="3" name="pole tekstowe 2">
+              <a:t>Treści Programowe</a:t>
+            </a:r>
+          </a:p>
+        </p:txBody>
+      </p:sp>
+      <p:sp>
+        <p:nvSpPr>
+          <p:cNvPr id="7" name="pole tekstowe 6">
             <a:extLst>
               <a:ext uri="{FF2B5EF4-FFF2-40B4-BE49-F238E27FC236}">
-                <a16:creationId xmlns:a16="http://schemas.microsoft.com/office/drawing/2014/main" id="{4A4EDC8D-624B-4D09-B81A-4A35B7BD53AB}"/>
+                <a16:creationId xmlns:a16="http://schemas.microsoft.com/office/drawing/2014/main" id="{2F467DBE-3D30-473E-A461-81CA88D2033B}"/>
               </a:ext>
             </a:extLst>
           </p:cNvPr>
@@ -7937,8 +7614,8 @@
         </p:nvSpPr>
         <p:spPr>
           <a:xfrm>
-            <a:off x="1296144" y="1495186"/>
-            <a:ext cx="7380312" cy="4801314"/>
+            <a:off x="1187624" y="908720"/>
+            <a:ext cx="7956376" cy="5786199"/>
           </a:xfrm>
           <a:prstGeom prst="rect">
             <a:avLst/>
@@ -7946,683 +7623,676 @@
           <a:noFill/>
         </p:spPr>
         <p:txBody>
-          <a:bodyPr wrap="square" rtlCol="0">
+          <a:bodyPr wrap="square">
             <a:spAutoFit/>
           </a:bodyPr>
           <a:lstStyle/>
           <a:p>
-            <a:pPr marL="285750" indent="-285750">
-              <a:buFont typeface="Arial" panose="020B0604020202020204" pitchFamily="34" charset="0"/>
-              <a:buChar char="•"/>
+            <a:pPr lvl="0">
+              <a:spcAft>
+                <a:spcPts val="600"/>
+              </a:spcAft>
+              <a:tabLst>
+                <a:tab pos="91440" algn="l"/>
+              </a:tabLst>
             </a:pPr>
             <a:r>
-              <a:rPr lang="pl-PL" sz="1800" b="1" i="0" dirty="0">
-                <a:solidFill>
-                  <a:schemeClr val="tx1"/>
-                </a:solidFill>
-                <a:effectLst/>
-                <a:latin typeface="OpenSans-Bold"/>
-              </a:rPr>
-              <a:t>FORTRAN: </a:t>
-            </a:r>
-            <a:r>
-              <a:rPr lang="pl-PL" sz="1800" b="1" i="0" dirty="0" err="1">
-                <a:solidFill>
-                  <a:schemeClr val="tx1"/>
-                </a:solidFill>
-                <a:effectLst/>
-                <a:latin typeface="OpenSans-Bold"/>
-              </a:rPr>
-              <a:t>FORmula</a:t>
-            </a:r>
-            <a:r>
-              <a:rPr lang="pl-PL" sz="1800" b="1" i="0" dirty="0">
-                <a:solidFill>
-                  <a:schemeClr val="tx1"/>
-                </a:solidFill>
-                <a:effectLst/>
-                <a:latin typeface="OpenSans-Bold"/>
-              </a:rPr>
-              <a:t> </a:t>
-            </a:r>
-            <a:r>
-              <a:rPr lang="pl-PL" sz="1800" b="1" i="0" dirty="0" err="1">
-                <a:solidFill>
-                  <a:schemeClr val="tx1"/>
-                </a:solidFill>
-                <a:effectLst/>
-                <a:latin typeface="OpenSans-Bold"/>
-              </a:rPr>
-              <a:t>TRANslation</a:t>
-            </a:r>
-            <a:r>
-              <a:rPr lang="pl-PL" sz="1800" b="1" i="0" dirty="0">
-                <a:solidFill>
-                  <a:schemeClr val="tx1"/>
-                </a:solidFill>
-                <a:effectLst/>
-                <a:latin typeface="OpenSans-Bold"/>
-              </a:rPr>
-              <a:t> (1957)</a:t>
-            </a:r>
-            <a:endParaRPr lang="pl-PL" sz="1800" b="1" dirty="0">
-              <a:solidFill>
-                <a:schemeClr val="tx1"/>
-              </a:solidFill>
-              <a:latin typeface="OpenSans-Bold"/>
-            </a:endParaRPr>
-          </a:p>
-          <a:p>
-            <a:pPr marL="285750" indent="-285750">
-              <a:buFont typeface="Arial" panose="020B0604020202020204" pitchFamily="34" charset="0"/>
-              <a:buChar char="•"/>
-            </a:pPr>
-            <a:r>
-              <a:rPr lang="pl-PL" sz="1800" b="1" i="0" dirty="0">
-                <a:solidFill>
-                  <a:schemeClr val="tx1"/>
-                </a:solidFill>
-                <a:effectLst/>
-                <a:latin typeface="OpenSans-Bold"/>
-              </a:rPr>
-              <a:t>LISP: </a:t>
-            </a:r>
-            <a:r>
-              <a:rPr lang="pl-PL" sz="1800" b="1" i="0" dirty="0" err="1">
-                <a:solidFill>
-                  <a:schemeClr val="tx1"/>
-                </a:solidFill>
-                <a:effectLst/>
-                <a:latin typeface="OpenSans-Bold"/>
-              </a:rPr>
-              <a:t>LISt</a:t>
-            </a:r>
-            <a:r>
-              <a:rPr lang="pl-PL" sz="1800" b="1" i="0" dirty="0">
-                <a:solidFill>
-                  <a:schemeClr val="tx1"/>
-                </a:solidFill>
-                <a:effectLst/>
-                <a:latin typeface="OpenSans-Bold"/>
-              </a:rPr>
-              <a:t> </a:t>
-            </a:r>
-            <a:r>
-              <a:rPr lang="pl-PL" sz="1800" b="1" i="0" dirty="0" err="1">
-                <a:solidFill>
-                  <a:schemeClr val="tx1"/>
-                </a:solidFill>
-                <a:effectLst/>
-                <a:latin typeface="OpenSans-Bold"/>
-              </a:rPr>
-              <a:t>Processor</a:t>
-            </a:r>
-            <a:r>
-              <a:rPr lang="pl-PL" sz="1800" b="1" i="0" dirty="0">
-                <a:solidFill>
-                  <a:schemeClr val="tx1"/>
-                </a:solidFill>
-                <a:effectLst/>
-                <a:latin typeface="OpenSans-Bold"/>
-              </a:rPr>
-              <a:t> (1958)</a:t>
-            </a:r>
-            <a:r>
-              <a:rPr lang="pl-PL" dirty="0">
-                <a:solidFill>
-                  <a:schemeClr val="tx1"/>
-                </a:solidFill>
-              </a:rPr>
-              <a:t> </a:t>
-            </a:r>
-          </a:p>
-          <a:p>
-            <a:pPr marL="285750" indent="-285750">
-              <a:buFont typeface="Arial" panose="020B0604020202020204" pitchFamily="34" charset="0"/>
-              <a:buChar char="•"/>
-            </a:pPr>
-            <a:r>
-              <a:rPr lang="pl-PL" sz="1800" b="1" i="0" dirty="0">
-                <a:solidFill>
-                  <a:schemeClr val="tx1"/>
-                </a:solidFill>
-                <a:effectLst/>
-                <a:latin typeface="OpenSans-Bold"/>
-              </a:rPr>
-              <a:t>ALGOL: </a:t>
-            </a:r>
-            <a:r>
-              <a:rPr lang="pl-PL" sz="1800" b="1" i="0" dirty="0" err="1">
-                <a:solidFill>
-                  <a:schemeClr val="tx1"/>
-                </a:solidFill>
-                <a:effectLst/>
-                <a:latin typeface="OpenSans-Bold"/>
-              </a:rPr>
-              <a:t>ALGOrithmic</a:t>
-            </a:r>
-            <a:r>
-              <a:rPr lang="pl-PL" sz="1800" b="1" i="0" dirty="0">
-                <a:solidFill>
-                  <a:schemeClr val="tx1"/>
-                </a:solidFill>
-                <a:effectLst/>
-                <a:latin typeface="OpenSans-Bold"/>
-              </a:rPr>
-              <a:t> Language (1958)</a:t>
-            </a:r>
-            <a:r>
-              <a:rPr lang="pl-PL" dirty="0">
-                <a:solidFill>
-                  <a:schemeClr val="tx1"/>
-                </a:solidFill>
-              </a:rPr>
-              <a:t> </a:t>
-            </a:r>
-          </a:p>
-          <a:p>
-            <a:pPr marL="285750" indent="-285750">
-              <a:buFont typeface="Arial" panose="020B0604020202020204" pitchFamily="34" charset="0"/>
-              <a:buChar char="•"/>
-            </a:pPr>
-            <a:r>
-              <a:rPr lang="en-US" sz="1800" b="1" i="0" dirty="0">
-                <a:solidFill>
-                  <a:schemeClr val="tx1"/>
-                </a:solidFill>
-                <a:effectLst/>
-                <a:latin typeface="OpenSans-Bold"/>
-              </a:rPr>
-              <a:t>COBOL: </a:t>
-            </a:r>
-            <a:r>
-              <a:rPr lang="en-US" sz="1800" b="1" i="0" dirty="0" err="1">
-                <a:solidFill>
-                  <a:schemeClr val="tx1"/>
-                </a:solidFill>
-                <a:effectLst/>
-                <a:latin typeface="OpenSans-Bold"/>
-              </a:rPr>
-              <a:t>COmmon</a:t>
-            </a:r>
-            <a:r>
-              <a:rPr lang="en-US" sz="1800" b="1" i="0" dirty="0">
-                <a:solidFill>
-                  <a:schemeClr val="tx1"/>
-                </a:solidFill>
-                <a:effectLst/>
-                <a:latin typeface="OpenSans-Bold"/>
-              </a:rPr>
-              <a:t> Business-Oriented Language (1959)</a:t>
-            </a:r>
-            <a:r>
-              <a:rPr lang="en-US" dirty="0">
-                <a:solidFill>
-                  <a:schemeClr val="tx1"/>
-                </a:solidFill>
-              </a:rPr>
-              <a:t> </a:t>
-            </a:r>
-            <a:endParaRPr lang="pl-PL" dirty="0">
-              <a:solidFill>
-                <a:schemeClr val="tx1"/>
-              </a:solidFill>
-            </a:endParaRPr>
-          </a:p>
-          <a:p>
-            <a:pPr marL="285750" indent="-285750">
-              <a:buFont typeface="Arial" panose="020B0604020202020204" pitchFamily="34" charset="0"/>
-              <a:buChar char="•"/>
-            </a:pPr>
-            <a:r>
-              <a:rPr lang="en-US" sz="1800" b="1" i="0" dirty="0">
-                <a:solidFill>
-                  <a:schemeClr val="tx1"/>
-                </a:solidFill>
-                <a:effectLst/>
-                <a:latin typeface="OpenSans-Bold"/>
-              </a:rPr>
-              <a:t>BASIC: Beginners’ All-purpose Symbolic Instruction</a:t>
-            </a:r>
-            <a:r>
-              <a:rPr lang="pl-PL" sz="1800" b="1" i="0" dirty="0">
-                <a:solidFill>
-                  <a:schemeClr val="tx1"/>
-                </a:solidFill>
-                <a:effectLst/>
-                <a:latin typeface="OpenSans-Bold"/>
-              </a:rPr>
-              <a:t> </a:t>
-            </a:r>
-            <a:r>
-              <a:rPr lang="en-US" sz="1800" b="1" i="0" dirty="0">
-                <a:solidFill>
-                  <a:schemeClr val="tx1"/>
-                </a:solidFill>
-                <a:effectLst/>
-                <a:latin typeface="OpenSans-Bold"/>
-              </a:rPr>
-              <a:t>Code (1964)</a:t>
-            </a:r>
-            <a:r>
-              <a:rPr lang="en-US" dirty="0">
-                <a:solidFill>
-                  <a:schemeClr val="tx1"/>
-                </a:solidFill>
-              </a:rPr>
-              <a:t> </a:t>
-            </a:r>
-            <a:endParaRPr lang="pl-PL" dirty="0">
-              <a:solidFill>
-                <a:schemeClr val="tx1"/>
-              </a:solidFill>
-            </a:endParaRPr>
-          </a:p>
-          <a:p>
-            <a:pPr marL="285750" indent="-285750">
-              <a:buFont typeface="Arial" panose="020B0604020202020204" pitchFamily="34" charset="0"/>
-              <a:buChar char="•"/>
-            </a:pPr>
-            <a:r>
-              <a:rPr lang="en-US" sz="1800" b="1" i="0" dirty="0" err="1">
-                <a:solidFill>
-                  <a:schemeClr val="tx1"/>
-                </a:solidFill>
-                <a:effectLst/>
-                <a:latin typeface="OpenSans-Bold"/>
-              </a:rPr>
-              <a:t>Simula</a:t>
-            </a:r>
-            <a:r>
-              <a:rPr lang="en-US" sz="1800" b="1" i="0" dirty="0">
-                <a:solidFill>
-                  <a:schemeClr val="tx1"/>
-                </a:solidFill>
-                <a:effectLst/>
-                <a:latin typeface="OpenSans-Bold"/>
-              </a:rPr>
-              <a:t> 67, the Original Object-Oriented Language</a:t>
-            </a:r>
-            <a:r>
-              <a:rPr lang="pl-PL" sz="1800" b="1" i="0" dirty="0">
-                <a:solidFill>
-                  <a:schemeClr val="tx1"/>
-                </a:solidFill>
-                <a:effectLst/>
-                <a:latin typeface="OpenSans-Bold"/>
-              </a:rPr>
-              <a:t> </a:t>
-            </a:r>
-            <a:r>
-              <a:rPr lang="en-US" sz="1800" b="1" i="0" dirty="0">
-                <a:solidFill>
-                  <a:schemeClr val="tx1"/>
-                </a:solidFill>
-                <a:effectLst/>
-                <a:latin typeface="OpenSans-Bold"/>
-              </a:rPr>
-              <a:t>(1967)</a:t>
-            </a:r>
-            <a:r>
-              <a:rPr lang="en-US" dirty="0">
-                <a:solidFill>
-                  <a:schemeClr val="tx1"/>
-                </a:solidFill>
-              </a:rPr>
-              <a:t> </a:t>
-            </a:r>
-            <a:endParaRPr lang="pl-PL" dirty="0">
-              <a:solidFill>
-                <a:schemeClr val="tx1"/>
-              </a:solidFill>
-            </a:endParaRPr>
-          </a:p>
-          <a:p>
-            <a:pPr marL="285750" indent="-285750">
-              <a:buFont typeface="Arial" panose="020B0604020202020204" pitchFamily="34" charset="0"/>
-              <a:buChar char="•"/>
-            </a:pPr>
-            <a:r>
-              <a:rPr lang="pl-PL" sz="1800" b="1" i="0" dirty="0">
-                <a:solidFill>
-                  <a:schemeClr val="tx1"/>
-                </a:solidFill>
-                <a:effectLst/>
-                <a:latin typeface="OpenSans-Bold"/>
-              </a:rPr>
-              <a:t>Pascal (1970)</a:t>
-            </a:r>
-            <a:r>
-              <a:rPr lang="pl-PL" dirty="0">
-                <a:solidFill>
-                  <a:schemeClr val="tx1"/>
-                </a:solidFill>
-              </a:rPr>
-              <a:t> </a:t>
-            </a:r>
-          </a:p>
-          <a:p>
-            <a:pPr marL="285750" indent="-285750">
-              <a:buFont typeface="Arial" panose="020B0604020202020204" pitchFamily="34" charset="0"/>
-              <a:buChar char="•"/>
-            </a:pPr>
-            <a:r>
-              <a:rPr lang="pl-PL" sz="1800" b="1" i="0" dirty="0">
-                <a:solidFill>
-                  <a:schemeClr val="tx1"/>
-                </a:solidFill>
-                <a:effectLst/>
-                <a:latin typeface="OpenSans-Bold"/>
-              </a:rPr>
-              <a:t>C (1972)</a:t>
-            </a:r>
-            <a:r>
-              <a:rPr lang="pl-PL" dirty="0">
-                <a:solidFill>
-                  <a:schemeClr val="tx1"/>
-                </a:solidFill>
-              </a:rPr>
-              <a:t> </a:t>
-            </a:r>
-          </a:p>
-          <a:p>
-            <a:pPr marL="285750" indent="-285750">
-              <a:buFont typeface="Arial" panose="020B0604020202020204" pitchFamily="34" charset="0"/>
-              <a:buChar char="•"/>
-            </a:pPr>
-            <a:r>
-              <a:rPr lang="pl-PL" sz="1800" b="1" i="0" dirty="0" err="1">
-                <a:solidFill>
-                  <a:schemeClr val="tx1"/>
-                </a:solidFill>
-                <a:effectLst/>
-                <a:latin typeface="OpenSans-Bold"/>
-              </a:rPr>
-              <a:t>Smalltalk</a:t>
-            </a:r>
-            <a:r>
-              <a:rPr lang="pl-PL" sz="1800" b="1" i="0" dirty="0">
-                <a:solidFill>
-                  <a:schemeClr val="tx1"/>
-                </a:solidFill>
-                <a:effectLst/>
-                <a:latin typeface="OpenSans-Bold"/>
-              </a:rPr>
-              <a:t> (1972)</a:t>
-            </a:r>
-            <a:r>
-              <a:rPr lang="pl-PL" dirty="0">
-                <a:solidFill>
-                  <a:schemeClr val="tx1"/>
-                </a:solidFill>
-              </a:rPr>
-              <a:t> </a:t>
-            </a:r>
-          </a:p>
-          <a:p>
-            <a:pPr marL="285750" indent="-285750">
-              <a:buFont typeface="Arial" panose="020B0604020202020204" pitchFamily="34" charset="0"/>
-              <a:buChar char="•"/>
-            </a:pPr>
-            <a:r>
-              <a:rPr lang="en-US" sz="1800" b="1" i="0" dirty="0">
-                <a:solidFill>
-                  <a:schemeClr val="tx1"/>
-                </a:solidFill>
-                <a:effectLst/>
-                <a:latin typeface="OpenSans-Bold"/>
-              </a:rPr>
-              <a:t>C++: A Better C with Objects (1983)</a:t>
-            </a:r>
-            <a:r>
-              <a:rPr lang="en-US" dirty="0">
-                <a:solidFill>
-                  <a:schemeClr val="tx1"/>
-                </a:solidFill>
-              </a:rPr>
-              <a:t> </a:t>
-            </a:r>
-            <a:endParaRPr lang="pl-PL" dirty="0">
-              <a:solidFill>
-                <a:schemeClr val="tx1"/>
-              </a:solidFill>
-            </a:endParaRPr>
-          </a:p>
-          <a:p>
-            <a:pPr marL="285750" indent="-285750">
-              <a:buFont typeface="Arial" panose="020B0604020202020204" pitchFamily="34" charset="0"/>
-              <a:buChar char="•"/>
-            </a:pPr>
-            <a:r>
-              <a:rPr lang="en-US" sz="1800" b="1" i="0" dirty="0">
-                <a:solidFill>
-                  <a:schemeClr val="tx1"/>
-                </a:solidFill>
-                <a:effectLst/>
-                <a:latin typeface="OpenSans-Bold"/>
-              </a:rPr>
-              <a:t>Python: (1990)</a:t>
-            </a:r>
-            <a:r>
-              <a:rPr lang="en-US" dirty="0">
-                <a:solidFill>
-                  <a:schemeClr val="tx1"/>
-                </a:solidFill>
-              </a:rPr>
-              <a:t> </a:t>
-            </a:r>
-            <a:endParaRPr lang="pl-PL" dirty="0">
-              <a:solidFill>
-                <a:schemeClr val="tx1"/>
-              </a:solidFill>
-            </a:endParaRPr>
-          </a:p>
-          <a:p>
-            <a:pPr marL="285750" indent="-285750">
-              <a:buFont typeface="Arial" panose="020B0604020202020204" pitchFamily="34" charset="0"/>
-              <a:buChar char="•"/>
-            </a:pPr>
-            <a:r>
-              <a:rPr lang="en-US" sz="1800" b="1" i="0" dirty="0">
-                <a:solidFill>
-                  <a:schemeClr val="tx1"/>
-                </a:solidFill>
-                <a:effectLst/>
-                <a:latin typeface="OpenSans-Bold"/>
-              </a:rPr>
-              <a:t>Haskell: Pure Functional Programming (1990)</a:t>
-            </a:r>
-            <a:endParaRPr lang="pl-PL" sz="1800" b="1" dirty="0">
-              <a:solidFill>
-                <a:schemeClr val="tx1"/>
-              </a:solidFill>
-              <a:latin typeface="OpenSans-Bold"/>
-            </a:endParaRPr>
-          </a:p>
-          <a:p>
-            <a:pPr marL="285750" indent="-285750">
-              <a:buFont typeface="Arial" panose="020B0604020202020204" pitchFamily="34" charset="0"/>
-              <a:buChar char="•"/>
-            </a:pPr>
-            <a:r>
-              <a:rPr lang="en-US" sz="1800" b="1" i="0" dirty="0">
-                <a:solidFill>
-                  <a:schemeClr val="tx1"/>
-                </a:solidFill>
-                <a:effectLst/>
-                <a:latin typeface="OpenSans-Bold"/>
-              </a:rPr>
-              <a:t>Java: Virtual Machines and Garbage Collection (1995)</a:t>
-            </a:r>
-            <a:r>
-              <a:rPr lang="en-US" dirty="0">
-                <a:solidFill>
-                  <a:schemeClr val="tx1"/>
-                </a:solidFill>
-              </a:rPr>
-              <a:t> </a:t>
-            </a:r>
-            <a:endParaRPr lang="pl-PL" dirty="0">
-              <a:solidFill>
-                <a:schemeClr val="tx1"/>
-              </a:solidFill>
-            </a:endParaRPr>
-          </a:p>
-          <a:p>
-            <a:pPr marL="285750" indent="-285750">
-              <a:buFont typeface="Arial" panose="020B0604020202020204" pitchFamily="34" charset="0"/>
-              <a:buChar char="•"/>
-            </a:pPr>
-            <a:r>
-              <a:rPr lang="pl-PL" sz="1800" b="1" i="0" dirty="0">
-                <a:solidFill>
-                  <a:schemeClr val="tx1"/>
-                </a:solidFill>
-                <a:effectLst/>
-                <a:latin typeface="OpenSans-Bold"/>
-              </a:rPr>
-              <a:t>JavaScript:  (1995)</a:t>
-            </a:r>
-          </a:p>
-          <a:p>
-            <a:pPr marL="285750" indent="-285750">
-              <a:buFont typeface="Arial" panose="020B0604020202020204" pitchFamily="34" charset="0"/>
-              <a:buChar char="•"/>
-            </a:pPr>
-            <a:r>
-              <a:rPr lang="nn-NO" sz="1800" b="1" i="0" dirty="0">
-                <a:solidFill>
-                  <a:schemeClr val="tx1"/>
-                </a:solidFill>
-                <a:effectLst/>
-                <a:latin typeface="OpenSans-Bold"/>
-              </a:rPr>
-              <a:t>C#: (2000)</a:t>
-            </a:r>
-            <a:endParaRPr lang="pl-PL" sz="1800" b="1" i="0" dirty="0">
+              <a:rPr lang="pl-PL" sz="1800" b="1" kern="150" dirty="0">
+                <a:solidFill>
+                  <a:schemeClr val="tx1"/>
+                </a:solidFill>
+                <a:effectLst/>
+                <a:latin typeface="+mj-lt"/>
+                <a:ea typeface="OpenSymbol"/>
+                <a:cs typeface="Verdana, Verdana"/>
+              </a:rPr>
+              <a:t>0.    </a:t>
+            </a:r>
+            <a:r>
+              <a:rPr lang="pl-PL" sz="2000" b="1" kern="150" dirty="0">
+                <a:solidFill>
+                  <a:schemeClr val="tx1"/>
+                </a:solidFill>
+                <a:effectLst/>
+                <a:latin typeface="+mj-lt"/>
+                <a:ea typeface="OpenSymbol"/>
+                <a:cs typeface="Verdana, Verdana"/>
+              </a:rPr>
+              <a:t>Wstęp</a:t>
+            </a:r>
+            <a:endParaRPr lang="pl-PL" sz="2000" kern="150" dirty="0">
               <a:solidFill>
                 <a:schemeClr val="tx1"/>
               </a:solidFill>
               <a:effectLst/>
-              <a:latin typeface="OpenSans-Bold"/>
+              <a:latin typeface="+mj-lt"/>
+              <a:ea typeface="OpenSymbol"/>
+              <a:cs typeface="OpenSymbol"/>
             </a:endParaRPr>
           </a:p>
           <a:p>
-            <a:pPr marL="285750" indent="-285750">
-              <a:buFont typeface="Arial" panose="020B0604020202020204" pitchFamily="34" charset="0"/>
-              <a:buChar char="•"/>
+            <a:pPr marL="342900" lvl="0" indent="-342900">
+              <a:spcAft>
+                <a:spcPts val="600"/>
+              </a:spcAft>
+              <a:buFont typeface="+mj-lt"/>
+              <a:buAutoNum type="arabicPeriod"/>
+              <a:tabLst>
+                <a:tab pos="91440" algn="l"/>
+              </a:tabLst>
             </a:pPr>
             <a:r>
-              <a:rPr lang="pl-PL" sz="1800" b="1" i="0" dirty="0">
-                <a:solidFill>
-                  <a:schemeClr val="tx1"/>
-                </a:solidFill>
-                <a:effectLst/>
-                <a:latin typeface="OpenSans-Bold"/>
-              </a:rPr>
-              <a:t>Scala: (2003)</a:t>
-            </a:r>
-          </a:p>
-          <a:p>
-            <a:pPr marL="285750" indent="-285750">
-              <a:buFont typeface="Arial" panose="020B0604020202020204" pitchFamily="34" charset="0"/>
-              <a:buChar char="•"/>
-            </a:pPr>
-            <a:r>
-              <a:rPr lang="en-US" sz="1800" b="1" i="0" dirty="0">
-                <a:solidFill>
-                  <a:schemeClr val="tx1"/>
-                </a:solidFill>
-                <a:effectLst/>
-                <a:latin typeface="OpenSans-Bold"/>
-              </a:rPr>
-              <a:t>Groovy: (2007)</a:t>
-            </a:r>
-            <a:endParaRPr lang="pl-PL" dirty="0">
+              <a:rPr lang="pl-PL" sz="2000" b="1" kern="150" dirty="0">
+                <a:solidFill>
+                  <a:schemeClr val="tx1"/>
+                </a:solidFill>
+                <a:effectLst/>
+                <a:latin typeface="+mj-lt"/>
+                <a:ea typeface="OpenSymbol"/>
+                <a:cs typeface="Verdana, Verdana"/>
+              </a:rPr>
+              <a:t>Typy danych</a:t>
+            </a:r>
+            <a:r>
+              <a:rPr lang="pl-PL" sz="2000" kern="150" dirty="0">
+                <a:solidFill>
+                  <a:schemeClr val="tx1"/>
+                </a:solidFill>
+                <a:latin typeface="+mj-lt"/>
+                <a:ea typeface="OpenSymbol"/>
+                <a:cs typeface="Verdana, Verdana"/>
+              </a:rPr>
+              <a:t>, </a:t>
+            </a:r>
+            <a:r>
+              <a:rPr lang="pl-PL" sz="2000" b="1" kern="150" dirty="0">
+                <a:solidFill>
+                  <a:schemeClr val="tx1"/>
+                </a:solidFill>
+                <a:effectLst/>
+                <a:latin typeface="+mj-lt"/>
+                <a:ea typeface="OpenSymbol"/>
+                <a:cs typeface="Verdana, Verdana"/>
+              </a:rPr>
+              <a:t>Wyrażenia, Instrukcje, Pętle</a:t>
+            </a:r>
+            <a:endParaRPr lang="pl-PL" sz="2000" kern="150" dirty="0">
               <a:solidFill>
                 <a:schemeClr val="tx1"/>
               </a:solidFill>
+              <a:effectLst/>
+              <a:latin typeface="+mj-lt"/>
+              <a:ea typeface="OpenSymbol"/>
+              <a:cs typeface="OpenSymbol"/>
             </a:endParaRPr>
           </a:p>
-        </p:txBody>
-      </p:sp>
-      <p:sp>
-        <p:nvSpPr>
-          <p:cNvPr id="4" name="pole tekstowe 3">
-            <a:extLst>
-              <a:ext uri="{FF2B5EF4-FFF2-40B4-BE49-F238E27FC236}">
-                <a16:creationId xmlns:a16="http://schemas.microsoft.com/office/drawing/2014/main" id="{C70CBCE9-0700-48B0-95BA-91932375B43E}"/>
-              </a:ext>
-            </a:extLst>
-          </p:cNvPr>
-          <p:cNvSpPr txBox="1"/>
-          <p:nvPr/>
-        </p:nvSpPr>
-        <p:spPr>
-          <a:xfrm>
-            <a:off x="1984321" y="839032"/>
-            <a:ext cx="7052176" cy="646331"/>
-          </a:xfrm>
-          <a:prstGeom prst="rect">
-            <a:avLst/>
-          </a:prstGeom>
-          <a:noFill/>
-        </p:spPr>
-        <p:txBody>
-          <a:bodyPr wrap="square" rtlCol="0">
-            <a:spAutoFit/>
-          </a:bodyPr>
-          <a:lstStyle/>
-          <a:p>
-            <a:r>
-              <a:rPr lang="en-US" sz="2400" b="1" i="0" dirty="0">
-                <a:solidFill>
-                  <a:schemeClr val="tx1"/>
-                </a:solidFill>
-                <a:effectLst/>
-                <a:latin typeface="OpenSans-Bold"/>
-              </a:rPr>
-              <a:t>Kotlin (Introduced 2011, Version 1.0:</a:t>
-            </a:r>
-            <a:r>
-              <a:rPr lang="pl-PL" sz="2400" b="1" i="0" dirty="0">
-                <a:solidFill>
-                  <a:schemeClr val="tx1"/>
-                </a:solidFill>
-                <a:effectLst/>
-                <a:latin typeface="OpenSans-Bold"/>
+          <a:p>
+            <a:pPr marL="342900" lvl="0" indent="-342900">
+              <a:spcAft>
+                <a:spcPts val="600"/>
+              </a:spcAft>
+              <a:buFont typeface="+mj-lt"/>
+              <a:buAutoNum type="arabicPeriod"/>
+              <a:tabLst>
+                <a:tab pos="91440" algn="l"/>
+              </a:tabLst>
+            </a:pPr>
+            <a:r>
+              <a:rPr lang="pl-PL" sz="2000" b="1" kern="150" dirty="0" err="1">
+                <a:solidFill>
+                  <a:schemeClr val="tx1"/>
+                </a:solidFill>
+                <a:effectLst/>
+                <a:latin typeface="+mj-lt"/>
+                <a:ea typeface="OpenSymbol"/>
+                <a:cs typeface="Verdana, Verdana"/>
+              </a:rPr>
+              <a:t>Garbage</a:t>
+            </a:r>
+            <a:r>
+              <a:rPr lang="pl-PL" sz="2000" b="1" kern="150" dirty="0">
+                <a:solidFill>
+                  <a:schemeClr val="tx1"/>
+                </a:solidFill>
+                <a:effectLst/>
+                <a:latin typeface="+mj-lt"/>
+                <a:ea typeface="OpenSymbol"/>
+                <a:cs typeface="Verdana, Verdana"/>
+              </a:rPr>
+              <a:t> Collection</a:t>
+            </a:r>
+          </a:p>
+          <a:p>
+            <a:pPr marL="342900" lvl="0" indent="-342900">
+              <a:spcAft>
+                <a:spcPts val="600"/>
+              </a:spcAft>
+              <a:buFont typeface="+mj-lt"/>
+              <a:buAutoNum type="arabicPeriod"/>
+              <a:tabLst>
+                <a:tab pos="91440" algn="l"/>
+              </a:tabLst>
+            </a:pPr>
+            <a:r>
+              <a:rPr lang="pl-PL" sz="2000" b="1" kern="150" dirty="0">
+                <a:solidFill>
+                  <a:schemeClr val="tx1"/>
+                </a:solidFill>
+                <a:latin typeface="+mj-lt"/>
+                <a:ea typeface="OpenSymbol"/>
+                <a:cs typeface="OpenSymbol"/>
+              </a:rPr>
+              <a:t>Funkcje</a:t>
+            </a:r>
+          </a:p>
+          <a:p>
+            <a:pPr marL="342900" lvl="0" indent="-342900">
+              <a:spcAft>
+                <a:spcPts val="600"/>
+              </a:spcAft>
+              <a:buFont typeface="+mj-lt"/>
+              <a:buAutoNum type="arabicPeriod"/>
+              <a:tabLst>
+                <a:tab pos="91440" algn="l"/>
+              </a:tabLst>
+            </a:pPr>
+            <a:r>
+              <a:rPr lang="pl-PL" sz="2000" b="1" kern="150" dirty="0">
+                <a:solidFill>
+                  <a:schemeClr val="tx1"/>
+                </a:solidFill>
+                <a:effectLst/>
+                <a:latin typeface="+mj-lt"/>
+                <a:ea typeface="OpenSymbol"/>
+                <a:cs typeface="OpenSymbol"/>
+              </a:rPr>
+              <a:t>Kolekcje</a:t>
+            </a:r>
+          </a:p>
+          <a:p>
+            <a:pPr marL="342900" lvl="0" indent="-342900">
+              <a:spcAft>
+                <a:spcPts val="600"/>
+              </a:spcAft>
+              <a:buFont typeface="+mj-lt"/>
+              <a:buAutoNum type="arabicPeriod"/>
+              <a:tabLst>
+                <a:tab pos="91440" algn="l"/>
+              </a:tabLst>
+            </a:pPr>
+            <a:r>
+              <a:rPr lang="pl-PL" sz="2000" b="1" kern="150" dirty="0">
+                <a:solidFill>
+                  <a:schemeClr val="tx1"/>
+                </a:solidFill>
+                <a:latin typeface="+mj-lt"/>
+                <a:ea typeface="OpenSymbol"/>
+                <a:cs typeface="OpenSymbol"/>
+              </a:rPr>
+              <a:t>Klasy</a:t>
+            </a:r>
+          </a:p>
+          <a:p>
+            <a:pPr marL="342900" lvl="0" indent="-342900">
+              <a:spcAft>
+                <a:spcPts val="600"/>
+              </a:spcAft>
+              <a:buFont typeface="+mj-lt"/>
+              <a:buAutoNum type="arabicPeriod"/>
+              <a:tabLst>
+                <a:tab pos="91440" algn="l"/>
+              </a:tabLst>
+            </a:pPr>
+            <a:r>
+              <a:rPr lang="pl-PL" sz="2000" b="1" kern="150" dirty="0">
+                <a:solidFill>
+                  <a:schemeClr val="tx1"/>
+                </a:solidFill>
+                <a:effectLst/>
+                <a:latin typeface="+mj-lt"/>
+                <a:ea typeface="OpenSymbol"/>
+                <a:cs typeface="OpenSymbol"/>
+              </a:rPr>
+              <a:t>O</a:t>
+            </a:r>
+            <a:r>
+              <a:rPr lang="pl-PL" sz="2000" b="1" kern="150" dirty="0">
+                <a:solidFill>
+                  <a:schemeClr val="tx1"/>
+                </a:solidFill>
+                <a:latin typeface="+mj-lt"/>
+                <a:ea typeface="OpenSymbol"/>
+                <a:cs typeface="OpenSymbol"/>
+              </a:rPr>
+              <a:t>biekty i Interfejsy</a:t>
+            </a:r>
+          </a:p>
+          <a:p>
+            <a:pPr marL="342900" lvl="0" indent="-342900">
+              <a:spcAft>
+                <a:spcPts val="600"/>
+              </a:spcAft>
+              <a:buFont typeface="+mj-lt"/>
+              <a:buAutoNum type="arabicPeriod"/>
+              <a:tabLst>
+                <a:tab pos="91440" algn="l"/>
+              </a:tabLst>
+            </a:pPr>
+            <a:r>
+              <a:rPr lang="pl-PL" sz="2000" b="1" kern="150" dirty="0">
+                <a:solidFill>
+                  <a:schemeClr val="tx1"/>
+                </a:solidFill>
+                <a:effectLst/>
+                <a:latin typeface="+mj-lt"/>
+                <a:ea typeface="OpenSymbol"/>
+                <a:cs typeface="OpenSymbol"/>
+              </a:rPr>
+              <a:t>Inicjalizacja i Delegacja</a:t>
+            </a:r>
+          </a:p>
+          <a:p>
+            <a:pPr marL="342900" lvl="0" indent="-342900">
+              <a:spcAft>
+                <a:spcPts val="600"/>
+              </a:spcAft>
+              <a:buFont typeface="+mj-lt"/>
+              <a:buAutoNum type="arabicPeriod"/>
+              <a:tabLst>
+                <a:tab pos="91440" algn="l"/>
+              </a:tabLst>
+            </a:pPr>
+            <a:r>
+              <a:rPr lang="pl-PL" sz="2000" b="1" kern="150" dirty="0">
+                <a:solidFill>
+                  <a:schemeClr val="tx1"/>
+                </a:solidFill>
+                <a:latin typeface="+mj-lt"/>
+                <a:ea typeface="OpenSymbol"/>
+                <a:cs typeface="OpenSymbol"/>
+              </a:rPr>
+              <a:t>Fundamenty Aplikacji. Aktywność, Cykl Życia. </a:t>
+            </a:r>
+            <a:r>
+              <a:rPr lang="pl-PL" sz="2000" b="1" kern="150" dirty="0" err="1">
+                <a:solidFill>
+                  <a:schemeClr val="tx1"/>
+                </a:solidFill>
+                <a:latin typeface="+mj-lt"/>
+                <a:ea typeface="OpenSymbol"/>
+                <a:cs typeface="OpenSymbol"/>
+              </a:rPr>
+              <a:t>Jetpack</a:t>
+            </a:r>
+            <a:r>
+              <a:rPr lang="pl-PL" sz="2000" b="1" kern="150" dirty="0">
+                <a:solidFill>
+                  <a:schemeClr val="tx1"/>
+                </a:solidFill>
+                <a:latin typeface="+mj-lt"/>
+                <a:ea typeface="OpenSymbol"/>
+                <a:cs typeface="OpenSymbol"/>
               </a:rPr>
               <a:t> </a:t>
             </a:r>
             <a:r>
-              <a:rPr lang="en-US" sz="2400" b="1" i="0" dirty="0">
-                <a:solidFill>
-                  <a:schemeClr val="tx1"/>
-                </a:solidFill>
-                <a:effectLst/>
-                <a:latin typeface="OpenSans-Bold"/>
-              </a:rPr>
-              <a:t>2016)</a:t>
-            </a:r>
-            <a:r>
-              <a:rPr lang="en-US" sz="1600" dirty="0">
-                <a:solidFill>
-                  <a:schemeClr val="tx1"/>
-                </a:solidFill>
-              </a:rPr>
-              <a:t> </a:t>
-            </a:r>
-            <a:br>
-              <a:rPr lang="en-US" dirty="0">
-                <a:solidFill>
-                  <a:schemeClr val="tx1"/>
-                </a:solidFill>
-              </a:rPr>
-            </a:br>
-            <a:endParaRPr lang="pl-PL" dirty="0">
+              <a:rPr lang="pl-PL" sz="2000" b="1" kern="150" dirty="0" err="1">
+                <a:solidFill>
+                  <a:schemeClr val="tx1"/>
+                </a:solidFill>
+                <a:latin typeface="+mj-lt"/>
+                <a:ea typeface="OpenSymbol"/>
+                <a:cs typeface="OpenSymbol"/>
+              </a:rPr>
+              <a:t>Compose</a:t>
+            </a:r>
+            <a:endParaRPr lang="pl-PL" sz="2000" b="1" kern="150" dirty="0">
               <a:solidFill>
                 <a:schemeClr val="tx1"/>
               </a:solidFill>
+              <a:latin typeface="+mj-lt"/>
+              <a:ea typeface="OpenSymbol"/>
+              <a:cs typeface="OpenSymbol"/>
+            </a:endParaRPr>
+          </a:p>
+          <a:p>
+            <a:pPr marL="342900" lvl="0" indent="-342900">
+              <a:spcAft>
+                <a:spcPts val="600"/>
+              </a:spcAft>
+              <a:buFont typeface="+mj-lt"/>
+              <a:buAutoNum type="arabicPeriod"/>
+              <a:tabLst>
+                <a:tab pos="91440" algn="l"/>
+              </a:tabLst>
+            </a:pPr>
+            <a:r>
+              <a:rPr lang="pl-PL" sz="2000" b="1" kern="150" dirty="0">
+                <a:solidFill>
+                  <a:schemeClr val="tx1"/>
+                </a:solidFill>
+                <a:effectLst/>
+                <a:latin typeface="+mj-lt"/>
+                <a:ea typeface="OpenSymbol"/>
+                <a:cs typeface="OpenSymbol"/>
+              </a:rPr>
+              <a:t>Podstawy </a:t>
+            </a:r>
+            <a:r>
+              <a:rPr lang="pl-PL" sz="2000" b="1" kern="150" dirty="0" err="1">
+                <a:solidFill>
+                  <a:schemeClr val="tx1"/>
+                </a:solidFill>
+                <a:effectLst/>
+                <a:latin typeface="+mj-lt"/>
+                <a:ea typeface="OpenSymbol"/>
+                <a:cs typeface="OpenSymbol"/>
+              </a:rPr>
+              <a:t>Tworzanie</a:t>
+            </a:r>
+            <a:r>
+              <a:rPr lang="pl-PL" sz="2000" b="1" kern="150" dirty="0">
+                <a:solidFill>
+                  <a:schemeClr val="tx1"/>
+                </a:solidFill>
+                <a:effectLst/>
+                <a:latin typeface="+mj-lt"/>
+                <a:ea typeface="OpenSymbol"/>
+                <a:cs typeface="OpenSymbol"/>
+              </a:rPr>
+              <a:t> UI, Kompozycja, </a:t>
+            </a:r>
+            <a:r>
+              <a:rPr lang="pl-PL" sz="2000" b="1" kern="150" dirty="0" err="1">
+                <a:solidFill>
+                  <a:schemeClr val="tx1"/>
+                </a:solidFill>
+                <a:effectLst/>
+                <a:latin typeface="+mj-lt"/>
+                <a:ea typeface="OpenSymbol"/>
+                <a:cs typeface="OpenSymbol"/>
+              </a:rPr>
+              <a:t>Rekompozycja</a:t>
+            </a:r>
+            <a:r>
+              <a:rPr lang="pl-PL" sz="2000" b="1" kern="150" dirty="0">
+                <a:solidFill>
+                  <a:schemeClr val="tx1"/>
+                </a:solidFill>
+                <a:effectLst/>
+                <a:latin typeface="+mj-lt"/>
+                <a:ea typeface="OpenSymbol"/>
+                <a:cs typeface="OpenSymbol"/>
+              </a:rPr>
+              <a:t>, Stan</a:t>
+            </a:r>
+          </a:p>
+          <a:p>
+            <a:pPr marL="342900" lvl="0" indent="-342900">
+              <a:spcAft>
+                <a:spcPts val="600"/>
+              </a:spcAft>
+              <a:buFont typeface="+mj-lt"/>
+              <a:buAutoNum type="arabicPeriod"/>
+              <a:tabLst>
+                <a:tab pos="91440" algn="l"/>
+              </a:tabLst>
+            </a:pPr>
+            <a:r>
+              <a:rPr lang="pl-PL" sz="2000" b="1" kern="150" dirty="0">
+                <a:solidFill>
+                  <a:schemeClr val="tx1"/>
+                </a:solidFill>
+                <a:effectLst/>
+                <a:latin typeface="+mj-lt"/>
+                <a:ea typeface="OpenSymbol"/>
+                <a:cs typeface="OpenSymbol"/>
+              </a:rPr>
+              <a:t>Elementy Struktury UI, </a:t>
+            </a:r>
+            <a:r>
+              <a:rPr lang="pl-PL" sz="2000" b="1" kern="150" dirty="0" err="1">
+                <a:solidFill>
+                  <a:schemeClr val="tx1"/>
+                </a:solidFill>
+                <a:effectLst/>
+                <a:latin typeface="+mj-lt"/>
+                <a:ea typeface="OpenSymbol"/>
+                <a:cs typeface="OpenSymbol"/>
+              </a:rPr>
+              <a:t>Scaffold</a:t>
+            </a:r>
+            <a:r>
+              <a:rPr lang="pl-PL" sz="2000" b="1" kern="150" dirty="0">
+                <a:solidFill>
+                  <a:schemeClr val="tx1"/>
+                </a:solidFill>
+                <a:effectLst/>
+                <a:latin typeface="+mj-lt"/>
+                <a:ea typeface="OpenSymbol"/>
+                <a:cs typeface="OpenSymbol"/>
+              </a:rPr>
+              <a:t>, Obsługa Kolekcji</a:t>
+            </a:r>
+          </a:p>
+          <a:p>
+            <a:pPr marL="342900" lvl="0" indent="-342900">
+              <a:spcAft>
+                <a:spcPts val="600"/>
+              </a:spcAft>
+              <a:buFont typeface="+mj-lt"/>
+              <a:buAutoNum type="arabicPeriod"/>
+              <a:tabLst>
+                <a:tab pos="91440" algn="l"/>
+              </a:tabLst>
+            </a:pPr>
+            <a:r>
+              <a:rPr lang="pl-PL" sz="2000" b="1" kern="150" dirty="0">
+                <a:solidFill>
+                  <a:schemeClr val="tx1"/>
+                </a:solidFill>
+                <a:latin typeface="+mj-lt"/>
+                <a:ea typeface="OpenSymbol"/>
+                <a:cs typeface="OpenSymbol"/>
+              </a:rPr>
+              <a:t>Nawigacja w Aplikacji. </a:t>
+            </a:r>
+            <a:r>
+              <a:rPr lang="pl-PL" sz="2000" b="1" kern="150" dirty="0" err="1">
+                <a:solidFill>
+                  <a:schemeClr val="tx1"/>
+                </a:solidFill>
+                <a:latin typeface="+mj-lt"/>
+                <a:ea typeface="OpenSymbol"/>
+                <a:cs typeface="OpenSymbol"/>
+              </a:rPr>
+              <a:t>Compose</a:t>
+            </a:r>
+            <a:r>
+              <a:rPr lang="pl-PL" sz="2000" b="1" kern="150" dirty="0">
+                <a:solidFill>
+                  <a:schemeClr val="tx1"/>
+                </a:solidFill>
+                <a:latin typeface="+mj-lt"/>
+                <a:ea typeface="OpenSymbol"/>
+                <a:cs typeface="OpenSymbol"/>
+              </a:rPr>
+              <a:t> </a:t>
+            </a:r>
+            <a:r>
+              <a:rPr lang="pl-PL" sz="2000" b="1" kern="150" dirty="0" err="1">
+                <a:solidFill>
+                  <a:schemeClr val="tx1"/>
+                </a:solidFill>
+                <a:latin typeface="+mj-lt"/>
+                <a:ea typeface="OpenSymbol"/>
+                <a:cs typeface="OpenSymbol"/>
+              </a:rPr>
+              <a:t>Navigation</a:t>
+            </a:r>
+            <a:r>
+              <a:rPr lang="pl-PL" sz="2000" b="1" kern="150" dirty="0">
+                <a:solidFill>
+                  <a:schemeClr val="tx1"/>
+                </a:solidFill>
+                <a:latin typeface="+mj-lt"/>
+                <a:ea typeface="OpenSymbol"/>
+                <a:cs typeface="OpenSymbol"/>
+              </a:rPr>
+              <a:t>, </a:t>
+            </a:r>
+            <a:r>
+              <a:rPr lang="pl-PL" sz="2000" b="1" kern="150" dirty="0" err="1">
+                <a:solidFill>
+                  <a:schemeClr val="tx1"/>
+                </a:solidFill>
+                <a:latin typeface="+mj-lt"/>
+                <a:ea typeface="OpenSymbol"/>
+                <a:cs typeface="OpenSymbol"/>
+              </a:rPr>
+              <a:t>Tab</a:t>
+            </a:r>
+            <a:r>
+              <a:rPr lang="pl-PL" sz="2000" b="1" kern="150" dirty="0">
+                <a:solidFill>
+                  <a:schemeClr val="tx1"/>
+                </a:solidFill>
+                <a:latin typeface="+mj-lt"/>
+                <a:ea typeface="OpenSymbol"/>
+                <a:cs typeface="OpenSymbol"/>
+              </a:rPr>
+              <a:t> </a:t>
+            </a:r>
+            <a:r>
+              <a:rPr lang="pl-PL" sz="2000" b="1" kern="150" dirty="0" err="1">
+                <a:solidFill>
+                  <a:schemeClr val="tx1"/>
+                </a:solidFill>
+                <a:latin typeface="+mj-lt"/>
+                <a:ea typeface="OpenSymbol"/>
+                <a:cs typeface="OpenSymbol"/>
+              </a:rPr>
+              <a:t>Navigation</a:t>
+            </a:r>
+            <a:r>
+              <a:rPr lang="pl-PL" sz="2000" b="1" kern="150" dirty="0">
+                <a:solidFill>
+                  <a:schemeClr val="tx1"/>
+                </a:solidFill>
+                <a:latin typeface="+mj-lt"/>
+                <a:ea typeface="OpenSymbol"/>
+                <a:cs typeface="OpenSymbol"/>
+              </a:rPr>
+              <a:t>, </a:t>
+            </a:r>
+            <a:r>
+              <a:rPr lang="pl-PL" sz="2000" b="1" kern="150" dirty="0" err="1">
+                <a:solidFill>
+                  <a:schemeClr val="tx1"/>
+                </a:solidFill>
+                <a:latin typeface="+mj-lt"/>
+                <a:ea typeface="OpenSymbol"/>
+                <a:cs typeface="OpenSymbol"/>
+              </a:rPr>
+              <a:t>Drawer</a:t>
+            </a:r>
+            <a:endParaRPr lang="pl-PL" sz="2000" b="1" kern="150" dirty="0">
+              <a:solidFill>
+                <a:schemeClr val="tx1"/>
+              </a:solidFill>
+              <a:latin typeface="+mj-lt"/>
+              <a:ea typeface="OpenSymbol"/>
+              <a:cs typeface="OpenSymbol"/>
+            </a:endParaRPr>
+          </a:p>
+          <a:p>
+            <a:pPr marL="342900" lvl="0" indent="-342900">
+              <a:spcAft>
+                <a:spcPts val="600"/>
+              </a:spcAft>
+              <a:buFont typeface="+mj-lt"/>
+              <a:buAutoNum type="arabicPeriod"/>
+              <a:tabLst>
+                <a:tab pos="91440" algn="l"/>
+              </a:tabLst>
+            </a:pPr>
+            <a:r>
+              <a:rPr lang="pl-PL" sz="2000" b="1" kern="150" dirty="0">
+                <a:solidFill>
+                  <a:schemeClr val="tx1"/>
+                </a:solidFill>
+                <a:effectLst/>
+                <a:latin typeface="+mj-lt"/>
+                <a:ea typeface="OpenSymbol"/>
+                <a:cs typeface="OpenSymbol"/>
+              </a:rPr>
+              <a:t>Wzorce Projekt</a:t>
+            </a:r>
+            <a:r>
+              <a:rPr lang="pl-PL" sz="2000" b="1" kern="150" dirty="0">
+                <a:solidFill>
+                  <a:schemeClr val="tx1"/>
+                </a:solidFill>
+                <a:latin typeface="+mj-lt"/>
+                <a:ea typeface="OpenSymbol"/>
+                <a:cs typeface="OpenSymbol"/>
+              </a:rPr>
+              <a:t>owe – Strukturalne i Kreacyjne</a:t>
+            </a:r>
+          </a:p>
+          <a:p>
+            <a:pPr marL="342900" lvl="0" indent="-342900">
+              <a:spcAft>
+                <a:spcPts val="600"/>
+              </a:spcAft>
+              <a:buFont typeface="+mj-lt"/>
+              <a:buAutoNum type="arabicPeriod"/>
+              <a:tabLst>
+                <a:tab pos="91440" algn="l"/>
+              </a:tabLst>
+            </a:pPr>
+            <a:r>
+              <a:rPr lang="pl-PL" sz="2000" b="1" kern="150" dirty="0">
+                <a:solidFill>
+                  <a:schemeClr val="tx1"/>
+                </a:solidFill>
+                <a:latin typeface="+mj-lt"/>
+                <a:ea typeface="OpenSymbol"/>
+                <a:cs typeface="OpenSymbol"/>
+              </a:rPr>
+              <a:t>Wzorce Projektowe – Behawioralne</a:t>
+            </a:r>
+          </a:p>
+          <a:p>
+            <a:pPr marL="342900" lvl="0" indent="-342900">
+              <a:spcAft>
+                <a:spcPts val="600"/>
+              </a:spcAft>
+              <a:buFont typeface="+mj-lt"/>
+              <a:buAutoNum type="arabicPeriod"/>
+              <a:tabLst>
+                <a:tab pos="91440" algn="l"/>
+              </a:tabLst>
+            </a:pPr>
+            <a:r>
+              <a:rPr lang="pl-PL" sz="2000" b="1" kern="150" dirty="0" err="1">
+                <a:solidFill>
+                  <a:schemeClr val="tx1"/>
+                </a:solidFill>
+                <a:latin typeface="+mj-lt"/>
+                <a:ea typeface="OpenSymbol"/>
+                <a:cs typeface="OpenSymbol"/>
+              </a:rPr>
+              <a:t>Widgety</a:t>
+            </a:r>
+            <a:endParaRPr lang="pl-PL" sz="2000" b="1" kern="150" dirty="0">
+              <a:solidFill>
+                <a:schemeClr val="tx1"/>
+              </a:solidFill>
+              <a:effectLst/>
+              <a:latin typeface="+mj-lt"/>
+              <a:ea typeface="OpenSymbol"/>
+              <a:cs typeface="OpenSymbol"/>
             </a:endParaRPr>
           </a:p>
         </p:txBody>
@@ -8630,7 +8300,7 @@
     </p:spTree>
     <p:extLst>
       <p:ext uri="{BB962C8B-B14F-4D97-AF65-F5344CB8AC3E}">
-        <p14:creationId xmlns:p14="http://schemas.microsoft.com/office/powerpoint/2010/main" val="2236679113"/>
+        <p14:creationId xmlns:p14="http://schemas.microsoft.com/office/powerpoint/2010/main" val="4009683948"/>
       </p:ext>
     </p:extLst>
   </p:cSld>
@@ -8700,6 +8370,788 @@
                 <a:ea typeface="Verdana" panose="020B0604030504040204" pitchFamily="34" charset="0"/>
                 <a:cs typeface="Verdana" panose="020B0604030504040204" pitchFamily="34" charset="0"/>
               </a:rPr>
+              <a:t>Kotlin – Język Przemysłowy</a:t>
+            </a:r>
+          </a:p>
+        </p:txBody>
+      </p:sp>
+      <p:sp>
+        <p:nvSpPr>
+          <p:cNvPr id="3" name="pole tekstowe 2">
+            <a:extLst>
+              <a:ext uri="{FF2B5EF4-FFF2-40B4-BE49-F238E27FC236}">
+                <a16:creationId xmlns:a16="http://schemas.microsoft.com/office/drawing/2014/main" id="{4A4EDC8D-624B-4D09-B81A-4A35B7BD53AB}"/>
+              </a:ext>
+            </a:extLst>
+          </p:cNvPr>
+          <p:cNvSpPr txBox="1"/>
+          <p:nvPr/>
+        </p:nvSpPr>
+        <p:spPr>
+          <a:xfrm>
+            <a:off x="1296144" y="1495186"/>
+            <a:ext cx="7380312" cy="4801314"/>
+          </a:xfrm>
+          <a:prstGeom prst="rect">
+            <a:avLst/>
+          </a:prstGeom>
+          <a:noFill/>
+        </p:spPr>
+        <p:txBody>
+          <a:bodyPr wrap="square" rtlCol="0">
+            <a:spAutoFit/>
+          </a:bodyPr>
+          <a:lstStyle/>
+          <a:p>
+            <a:pPr marL="285750" indent="-285750">
+              <a:buFont typeface="Arial" panose="020B0604020202020204" pitchFamily="34" charset="0"/>
+              <a:buChar char="•"/>
+            </a:pPr>
+            <a:r>
+              <a:rPr lang="pl-PL" sz="1800" b="1" i="0" dirty="0">
+                <a:solidFill>
+                  <a:schemeClr val="tx1"/>
+                </a:solidFill>
+                <a:effectLst/>
+                <a:latin typeface="OpenSans-Bold"/>
+              </a:rPr>
+              <a:t>FORTRAN: </a:t>
+            </a:r>
+            <a:r>
+              <a:rPr lang="pl-PL" sz="1800" b="1" i="0" dirty="0" err="1">
+                <a:solidFill>
+                  <a:schemeClr val="tx1"/>
+                </a:solidFill>
+                <a:effectLst/>
+                <a:latin typeface="OpenSans-Bold"/>
+              </a:rPr>
+              <a:t>FORmula</a:t>
+            </a:r>
+            <a:r>
+              <a:rPr lang="pl-PL" sz="1800" b="1" i="0" dirty="0">
+                <a:solidFill>
+                  <a:schemeClr val="tx1"/>
+                </a:solidFill>
+                <a:effectLst/>
+                <a:latin typeface="OpenSans-Bold"/>
+              </a:rPr>
+              <a:t> </a:t>
+            </a:r>
+            <a:r>
+              <a:rPr lang="pl-PL" sz="1800" b="1" i="0" dirty="0" err="1">
+                <a:solidFill>
+                  <a:schemeClr val="tx1"/>
+                </a:solidFill>
+                <a:effectLst/>
+                <a:latin typeface="OpenSans-Bold"/>
+              </a:rPr>
+              <a:t>TRANslation</a:t>
+            </a:r>
+            <a:r>
+              <a:rPr lang="pl-PL" sz="1800" b="1" i="0" dirty="0">
+                <a:solidFill>
+                  <a:schemeClr val="tx1"/>
+                </a:solidFill>
+                <a:effectLst/>
+                <a:latin typeface="OpenSans-Bold"/>
+              </a:rPr>
+              <a:t> (1957)</a:t>
+            </a:r>
+            <a:endParaRPr lang="pl-PL" sz="1800" b="1" dirty="0">
+              <a:solidFill>
+                <a:schemeClr val="tx1"/>
+              </a:solidFill>
+              <a:latin typeface="OpenSans-Bold"/>
+            </a:endParaRPr>
+          </a:p>
+          <a:p>
+            <a:pPr marL="285750" indent="-285750">
+              <a:buFont typeface="Arial" panose="020B0604020202020204" pitchFamily="34" charset="0"/>
+              <a:buChar char="•"/>
+            </a:pPr>
+            <a:r>
+              <a:rPr lang="pl-PL" sz="1800" b="1" i="0" dirty="0">
+                <a:solidFill>
+                  <a:schemeClr val="tx1"/>
+                </a:solidFill>
+                <a:effectLst/>
+                <a:latin typeface="OpenSans-Bold"/>
+              </a:rPr>
+              <a:t>LISP: </a:t>
+            </a:r>
+            <a:r>
+              <a:rPr lang="pl-PL" sz="1800" b="1" i="0" dirty="0" err="1">
+                <a:solidFill>
+                  <a:schemeClr val="tx1"/>
+                </a:solidFill>
+                <a:effectLst/>
+                <a:latin typeface="OpenSans-Bold"/>
+              </a:rPr>
+              <a:t>LISt</a:t>
+            </a:r>
+            <a:r>
+              <a:rPr lang="pl-PL" sz="1800" b="1" i="0" dirty="0">
+                <a:solidFill>
+                  <a:schemeClr val="tx1"/>
+                </a:solidFill>
+                <a:effectLst/>
+                <a:latin typeface="OpenSans-Bold"/>
+              </a:rPr>
+              <a:t> </a:t>
+            </a:r>
+            <a:r>
+              <a:rPr lang="pl-PL" sz="1800" b="1" i="0" dirty="0" err="1">
+                <a:solidFill>
+                  <a:schemeClr val="tx1"/>
+                </a:solidFill>
+                <a:effectLst/>
+                <a:latin typeface="OpenSans-Bold"/>
+              </a:rPr>
+              <a:t>Processor</a:t>
+            </a:r>
+            <a:r>
+              <a:rPr lang="pl-PL" sz="1800" b="1" i="0" dirty="0">
+                <a:solidFill>
+                  <a:schemeClr val="tx1"/>
+                </a:solidFill>
+                <a:effectLst/>
+                <a:latin typeface="OpenSans-Bold"/>
+              </a:rPr>
+              <a:t> (1958)</a:t>
+            </a:r>
+            <a:r>
+              <a:rPr lang="pl-PL" dirty="0">
+                <a:solidFill>
+                  <a:schemeClr val="tx1"/>
+                </a:solidFill>
+              </a:rPr>
+              <a:t> </a:t>
+            </a:r>
+          </a:p>
+          <a:p>
+            <a:pPr marL="285750" indent="-285750">
+              <a:buFont typeface="Arial" panose="020B0604020202020204" pitchFamily="34" charset="0"/>
+              <a:buChar char="•"/>
+            </a:pPr>
+            <a:r>
+              <a:rPr lang="pl-PL" sz="1800" b="1" i="0" dirty="0">
+                <a:solidFill>
+                  <a:schemeClr val="tx1"/>
+                </a:solidFill>
+                <a:effectLst/>
+                <a:latin typeface="OpenSans-Bold"/>
+              </a:rPr>
+              <a:t>ALGOL: </a:t>
+            </a:r>
+            <a:r>
+              <a:rPr lang="pl-PL" sz="1800" b="1" i="0" dirty="0" err="1">
+                <a:solidFill>
+                  <a:schemeClr val="tx1"/>
+                </a:solidFill>
+                <a:effectLst/>
+                <a:latin typeface="OpenSans-Bold"/>
+              </a:rPr>
+              <a:t>ALGOrithmic</a:t>
+            </a:r>
+            <a:r>
+              <a:rPr lang="pl-PL" sz="1800" b="1" i="0" dirty="0">
+                <a:solidFill>
+                  <a:schemeClr val="tx1"/>
+                </a:solidFill>
+                <a:effectLst/>
+                <a:latin typeface="OpenSans-Bold"/>
+              </a:rPr>
+              <a:t> Language (1958)</a:t>
+            </a:r>
+            <a:r>
+              <a:rPr lang="pl-PL" dirty="0">
+                <a:solidFill>
+                  <a:schemeClr val="tx1"/>
+                </a:solidFill>
+              </a:rPr>
+              <a:t> </a:t>
+            </a:r>
+          </a:p>
+          <a:p>
+            <a:pPr marL="285750" indent="-285750">
+              <a:buFont typeface="Arial" panose="020B0604020202020204" pitchFamily="34" charset="0"/>
+              <a:buChar char="•"/>
+            </a:pPr>
+            <a:r>
+              <a:rPr lang="en-US" sz="1800" b="1" i="0" dirty="0">
+                <a:solidFill>
+                  <a:schemeClr val="tx1"/>
+                </a:solidFill>
+                <a:effectLst/>
+                <a:latin typeface="OpenSans-Bold"/>
+              </a:rPr>
+              <a:t>COBOL: </a:t>
+            </a:r>
+            <a:r>
+              <a:rPr lang="en-US" sz="1800" b="1" i="0" dirty="0" err="1">
+                <a:solidFill>
+                  <a:schemeClr val="tx1"/>
+                </a:solidFill>
+                <a:effectLst/>
+                <a:latin typeface="OpenSans-Bold"/>
+              </a:rPr>
+              <a:t>COmmon</a:t>
+            </a:r>
+            <a:r>
+              <a:rPr lang="en-US" sz="1800" b="1" i="0" dirty="0">
+                <a:solidFill>
+                  <a:schemeClr val="tx1"/>
+                </a:solidFill>
+                <a:effectLst/>
+                <a:latin typeface="OpenSans-Bold"/>
+              </a:rPr>
+              <a:t> Business-Oriented Language (1959)</a:t>
+            </a:r>
+            <a:r>
+              <a:rPr lang="en-US" dirty="0">
+                <a:solidFill>
+                  <a:schemeClr val="tx1"/>
+                </a:solidFill>
+              </a:rPr>
+              <a:t> </a:t>
+            </a:r>
+            <a:endParaRPr lang="pl-PL" dirty="0">
+              <a:solidFill>
+                <a:schemeClr val="tx1"/>
+              </a:solidFill>
+            </a:endParaRPr>
+          </a:p>
+          <a:p>
+            <a:pPr marL="285750" indent="-285750">
+              <a:buFont typeface="Arial" panose="020B0604020202020204" pitchFamily="34" charset="0"/>
+              <a:buChar char="•"/>
+            </a:pPr>
+            <a:r>
+              <a:rPr lang="en-US" sz="1800" b="1" i="0" dirty="0">
+                <a:solidFill>
+                  <a:schemeClr val="tx1"/>
+                </a:solidFill>
+                <a:effectLst/>
+                <a:latin typeface="OpenSans-Bold"/>
+              </a:rPr>
+              <a:t>BASIC: Beginners’ All-purpose Symbolic Instruction</a:t>
+            </a:r>
+            <a:r>
+              <a:rPr lang="pl-PL" sz="1800" b="1" i="0" dirty="0">
+                <a:solidFill>
+                  <a:schemeClr val="tx1"/>
+                </a:solidFill>
+                <a:effectLst/>
+                <a:latin typeface="OpenSans-Bold"/>
+              </a:rPr>
+              <a:t> </a:t>
+            </a:r>
+            <a:r>
+              <a:rPr lang="en-US" sz="1800" b="1" i="0" dirty="0">
+                <a:solidFill>
+                  <a:schemeClr val="tx1"/>
+                </a:solidFill>
+                <a:effectLst/>
+                <a:latin typeface="OpenSans-Bold"/>
+              </a:rPr>
+              <a:t>Code (1964)</a:t>
+            </a:r>
+            <a:r>
+              <a:rPr lang="en-US" dirty="0">
+                <a:solidFill>
+                  <a:schemeClr val="tx1"/>
+                </a:solidFill>
+              </a:rPr>
+              <a:t> </a:t>
+            </a:r>
+            <a:endParaRPr lang="pl-PL" dirty="0">
+              <a:solidFill>
+                <a:schemeClr val="tx1"/>
+              </a:solidFill>
+            </a:endParaRPr>
+          </a:p>
+          <a:p>
+            <a:pPr marL="285750" indent="-285750">
+              <a:buFont typeface="Arial" panose="020B0604020202020204" pitchFamily="34" charset="0"/>
+              <a:buChar char="•"/>
+            </a:pPr>
+            <a:r>
+              <a:rPr lang="en-US" sz="1800" b="1" i="0" dirty="0" err="1">
+                <a:solidFill>
+                  <a:schemeClr val="tx1"/>
+                </a:solidFill>
+                <a:effectLst/>
+                <a:latin typeface="OpenSans-Bold"/>
+              </a:rPr>
+              <a:t>Simula</a:t>
+            </a:r>
+            <a:r>
+              <a:rPr lang="en-US" sz="1800" b="1" i="0" dirty="0">
+                <a:solidFill>
+                  <a:schemeClr val="tx1"/>
+                </a:solidFill>
+                <a:effectLst/>
+                <a:latin typeface="OpenSans-Bold"/>
+              </a:rPr>
+              <a:t> 67, the Original Object-Oriented Language</a:t>
+            </a:r>
+            <a:r>
+              <a:rPr lang="pl-PL" sz="1800" b="1" i="0" dirty="0">
+                <a:solidFill>
+                  <a:schemeClr val="tx1"/>
+                </a:solidFill>
+                <a:effectLst/>
+                <a:latin typeface="OpenSans-Bold"/>
+              </a:rPr>
+              <a:t> </a:t>
+            </a:r>
+            <a:r>
+              <a:rPr lang="en-US" sz="1800" b="1" i="0" dirty="0">
+                <a:solidFill>
+                  <a:schemeClr val="tx1"/>
+                </a:solidFill>
+                <a:effectLst/>
+                <a:latin typeface="OpenSans-Bold"/>
+              </a:rPr>
+              <a:t>(1967)</a:t>
+            </a:r>
+            <a:r>
+              <a:rPr lang="en-US" dirty="0">
+                <a:solidFill>
+                  <a:schemeClr val="tx1"/>
+                </a:solidFill>
+              </a:rPr>
+              <a:t> </a:t>
+            </a:r>
+            <a:endParaRPr lang="pl-PL" dirty="0">
+              <a:solidFill>
+                <a:schemeClr val="tx1"/>
+              </a:solidFill>
+            </a:endParaRPr>
+          </a:p>
+          <a:p>
+            <a:pPr marL="285750" indent="-285750">
+              <a:buFont typeface="Arial" panose="020B0604020202020204" pitchFamily="34" charset="0"/>
+              <a:buChar char="•"/>
+            </a:pPr>
+            <a:r>
+              <a:rPr lang="pl-PL" sz="1800" b="1" i="0" dirty="0">
+                <a:solidFill>
+                  <a:schemeClr val="tx1"/>
+                </a:solidFill>
+                <a:effectLst/>
+                <a:latin typeface="OpenSans-Bold"/>
+              </a:rPr>
+              <a:t>Pascal (1970)</a:t>
+            </a:r>
+            <a:r>
+              <a:rPr lang="pl-PL" dirty="0">
+                <a:solidFill>
+                  <a:schemeClr val="tx1"/>
+                </a:solidFill>
+              </a:rPr>
+              <a:t> </a:t>
+            </a:r>
+          </a:p>
+          <a:p>
+            <a:pPr marL="285750" indent="-285750">
+              <a:buFont typeface="Arial" panose="020B0604020202020204" pitchFamily="34" charset="0"/>
+              <a:buChar char="•"/>
+            </a:pPr>
+            <a:r>
+              <a:rPr lang="pl-PL" sz="1800" b="1" i="0" dirty="0">
+                <a:solidFill>
+                  <a:schemeClr val="tx1"/>
+                </a:solidFill>
+                <a:effectLst/>
+                <a:latin typeface="OpenSans-Bold"/>
+              </a:rPr>
+              <a:t>C (1972)</a:t>
+            </a:r>
+            <a:r>
+              <a:rPr lang="pl-PL" dirty="0">
+                <a:solidFill>
+                  <a:schemeClr val="tx1"/>
+                </a:solidFill>
+              </a:rPr>
+              <a:t> </a:t>
+            </a:r>
+          </a:p>
+          <a:p>
+            <a:pPr marL="285750" indent="-285750">
+              <a:buFont typeface="Arial" panose="020B0604020202020204" pitchFamily="34" charset="0"/>
+              <a:buChar char="•"/>
+            </a:pPr>
+            <a:r>
+              <a:rPr lang="pl-PL" sz="1800" b="1" i="0" dirty="0" err="1">
+                <a:solidFill>
+                  <a:schemeClr val="tx1"/>
+                </a:solidFill>
+                <a:effectLst/>
+                <a:latin typeface="OpenSans-Bold"/>
+              </a:rPr>
+              <a:t>Smalltalk</a:t>
+            </a:r>
+            <a:r>
+              <a:rPr lang="pl-PL" sz="1800" b="1" i="0" dirty="0">
+                <a:solidFill>
+                  <a:schemeClr val="tx1"/>
+                </a:solidFill>
+                <a:effectLst/>
+                <a:latin typeface="OpenSans-Bold"/>
+              </a:rPr>
+              <a:t> (1972)</a:t>
+            </a:r>
+            <a:r>
+              <a:rPr lang="pl-PL" dirty="0">
+                <a:solidFill>
+                  <a:schemeClr val="tx1"/>
+                </a:solidFill>
+              </a:rPr>
+              <a:t> </a:t>
+            </a:r>
+          </a:p>
+          <a:p>
+            <a:pPr marL="285750" indent="-285750">
+              <a:buFont typeface="Arial" panose="020B0604020202020204" pitchFamily="34" charset="0"/>
+              <a:buChar char="•"/>
+            </a:pPr>
+            <a:r>
+              <a:rPr lang="en-US" sz="1800" b="1" i="0" dirty="0">
+                <a:solidFill>
+                  <a:schemeClr val="tx1"/>
+                </a:solidFill>
+                <a:effectLst/>
+                <a:latin typeface="OpenSans-Bold"/>
+              </a:rPr>
+              <a:t>C++: A Better C with Objects (1983)</a:t>
+            </a:r>
+            <a:r>
+              <a:rPr lang="en-US" dirty="0">
+                <a:solidFill>
+                  <a:schemeClr val="tx1"/>
+                </a:solidFill>
+              </a:rPr>
+              <a:t> </a:t>
+            </a:r>
+            <a:endParaRPr lang="pl-PL" dirty="0">
+              <a:solidFill>
+                <a:schemeClr val="tx1"/>
+              </a:solidFill>
+            </a:endParaRPr>
+          </a:p>
+          <a:p>
+            <a:pPr marL="285750" indent="-285750">
+              <a:buFont typeface="Arial" panose="020B0604020202020204" pitchFamily="34" charset="0"/>
+              <a:buChar char="•"/>
+            </a:pPr>
+            <a:r>
+              <a:rPr lang="en-US" sz="1800" b="1" i="0" dirty="0">
+                <a:solidFill>
+                  <a:schemeClr val="tx1"/>
+                </a:solidFill>
+                <a:effectLst/>
+                <a:latin typeface="OpenSans-Bold"/>
+              </a:rPr>
+              <a:t>Python: (1990)</a:t>
+            </a:r>
+            <a:r>
+              <a:rPr lang="en-US" dirty="0">
+                <a:solidFill>
+                  <a:schemeClr val="tx1"/>
+                </a:solidFill>
+              </a:rPr>
+              <a:t> </a:t>
+            </a:r>
+            <a:endParaRPr lang="pl-PL" dirty="0">
+              <a:solidFill>
+                <a:schemeClr val="tx1"/>
+              </a:solidFill>
+            </a:endParaRPr>
+          </a:p>
+          <a:p>
+            <a:pPr marL="285750" indent="-285750">
+              <a:buFont typeface="Arial" panose="020B0604020202020204" pitchFamily="34" charset="0"/>
+              <a:buChar char="•"/>
+            </a:pPr>
+            <a:r>
+              <a:rPr lang="en-US" sz="1800" b="1" i="0" dirty="0">
+                <a:solidFill>
+                  <a:schemeClr val="tx1"/>
+                </a:solidFill>
+                <a:effectLst/>
+                <a:latin typeface="OpenSans-Bold"/>
+              </a:rPr>
+              <a:t>Haskell: Pure Functional Programming (1990)</a:t>
+            </a:r>
+            <a:endParaRPr lang="pl-PL" sz="1800" b="1" dirty="0">
+              <a:solidFill>
+                <a:schemeClr val="tx1"/>
+              </a:solidFill>
+              <a:latin typeface="OpenSans-Bold"/>
+            </a:endParaRPr>
+          </a:p>
+          <a:p>
+            <a:pPr marL="285750" indent="-285750">
+              <a:buFont typeface="Arial" panose="020B0604020202020204" pitchFamily="34" charset="0"/>
+              <a:buChar char="•"/>
+            </a:pPr>
+            <a:r>
+              <a:rPr lang="en-US" sz="1800" b="1" i="0" dirty="0">
+                <a:solidFill>
+                  <a:schemeClr val="tx1"/>
+                </a:solidFill>
+                <a:effectLst/>
+                <a:latin typeface="OpenSans-Bold"/>
+              </a:rPr>
+              <a:t>Java: Virtual Machines and Garbage Collection (1995)</a:t>
+            </a:r>
+            <a:r>
+              <a:rPr lang="en-US" dirty="0">
+                <a:solidFill>
+                  <a:schemeClr val="tx1"/>
+                </a:solidFill>
+              </a:rPr>
+              <a:t> </a:t>
+            </a:r>
+            <a:endParaRPr lang="pl-PL" dirty="0">
+              <a:solidFill>
+                <a:schemeClr val="tx1"/>
+              </a:solidFill>
+            </a:endParaRPr>
+          </a:p>
+          <a:p>
+            <a:pPr marL="285750" indent="-285750">
+              <a:buFont typeface="Arial" panose="020B0604020202020204" pitchFamily="34" charset="0"/>
+              <a:buChar char="•"/>
+            </a:pPr>
+            <a:r>
+              <a:rPr lang="pl-PL" sz="1800" b="1" i="0" dirty="0">
+                <a:solidFill>
+                  <a:schemeClr val="tx1"/>
+                </a:solidFill>
+                <a:effectLst/>
+                <a:latin typeface="OpenSans-Bold"/>
+              </a:rPr>
+              <a:t>JavaScript:  (1995)</a:t>
+            </a:r>
+          </a:p>
+          <a:p>
+            <a:pPr marL="285750" indent="-285750">
+              <a:buFont typeface="Arial" panose="020B0604020202020204" pitchFamily="34" charset="0"/>
+              <a:buChar char="•"/>
+            </a:pPr>
+            <a:r>
+              <a:rPr lang="nn-NO" sz="1800" b="1" i="0" dirty="0">
+                <a:solidFill>
+                  <a:schemeClr val="tx1"/>
+                </a:solidFill>
+                <a:effectLst/>
+                <a:latin typeface="OpenSans-Bold"/>
+              </a:rPr>
+              <a:t>C#: (2000)</a:t>
+            </a:r>
+            <a:endParaRPr lang="pl-PL" sz="1800" b="1" i="0" dirty="0">
+              <a:solidFill>
+                <a:schemeClr val="tx1"/>
+              </a:solidFill>
+              <a:effectLst/>
+              <a:latin typeface="OpenSans-Bold"/>
+            </a:endParaRPr>
+          </a:p>
+          <a:p>
+            <a:pPr marL="285750" indent="-285750">
+              <a:buFont typeface="Arial" panose="020B0604020202020204" pitchFamily="34" charset="0"/>
+              <a:buChar char="•"/>
+            </a:pPr>
+            <a:r>
+              <a:rPr lang="pl-PL" sz="1800" b="1" i="0" dirty="0">
+                <a:solidFill>
+                  <a:schemeClr val="tx1"/>
+                </a:solidFill>
+                <a:effectLst/>
+                <a:latin typeface="OpenSans-Bold"/>
+              </a:rPr>
+              <a:t>Scala: (2003)</a:t>
+            </a:r>
+          </a:p>
+          <a:p>
+            <a:pPr marL="285750" indent="-285750">
+              <a:buFont typeface="Arial" panose="020B0604020202020204" pitchFamily="34" charset="0"/>
+              <a:buChar char="•"/>
+            </a:pPr>
+            <a:r>
+              <a:rPr lang="en-US" sz="1800" b="1" i="0" dirty="0">
+                <a:solidFill>
+                  <a:schemeClr val="tx1"/>
+                </a:solidFill>
+                <a:effectLst/>
+                <a:latin typeface="OpenSans-Bold"/>
+              </a:rPr>
+              <a:t>Groovy: (2007)</a:t>
+            </a:r>
+            <a:endParaRPr lang="pl-PL" dirty="0">
+              <a:solidFill>
+                <a:schemeClr val="tx1"/>
+              </a:solidFill>
+            </a:endParaRPr>
+          </a:p>
+        </p:txBody>
+      </p:sp>
+      <p:sp>
+        <p:nvSpPr>
+          <p:cNvPr id="4" name="pole tekstowe 3">
+            <a:extLst>
+              <a:ext uri="{FF2B5EF4-FFF2-40B4-BE49-F238E27FC236}">
+                <a16:creationId xmlns:a16="http://schemas.microsoft.com/office/drawing/2014/main" id="{C70CBCE9-0700-48B0-95BA-91932375B43E}"/>
+              </a:ext>
+            </a:extLst>
+          </p:cNvPr>
+          <p:cNvSpPr txBox="1"/>
+          <p:nvPr/>
+        </p:nvSpPr>
+        <p:spPr>
+          <a:xfrm>
+            <a:off x="1984321" y="839032"/>
+            <a:ext cx="7052176" cy="646331"/>
+          </a:xfrm>
+          <a:prstGeom prst="rect">
+            <a:avLst/>
+          </a:prstGeom>
+          <a:noFill/>
+        </p:spPr>
+        <p:txBody>
+          <a:bodyPr wrap="square" rtlCol="0">
+            <a:spAutoFit/>
+          </a:bodyPr>
+          <a:lstStyle/>
+          <a:p>
+            <a:r>
+              <a:rPr lang="en-US" sz="2400" b="1" i="0" dirty="0">
+                <a:solidFill>
+                  <a:schemeClr val="tx1"/>
+                </a:solidFill>
+                <a:effectLst/>
+                <a:latin typeface="OpenSans-Bold"/>
+              </a:rPr>
+              <a:t>Kotlin (Introduced 2011, Version 1.0:</a:t>
+            </a:r>
+            <a:r>
+              <a:rPr lang="pl-PL" sz="2400" b="1" i="0" dirty="0">
+                <a:solidFill>
+                  <a:schemeClr val="tx1"/>
+                </a:solidFill>
+                <a:effectLst/>
+                <a:latin typeface="OpenSans-Bold"/>
+              </a:rPr>
+              <a:t> </a:t>
+            </a:r>
+            <a:r>
+              <a:rPr lang="en-US" sz="2400" b="1" i="0" dirty="0">
+                <a:solidFill>
+                  <a:schemeClr val="tx1"/>
+                </a:solidFill>
+                <a:effectLst/>
+                <a:latin typeface="OpenSans-Bold"/>
+              </a:rPr>
+              <a:t>2016)</a:t>
+            </a:r>
+            <a:r>
+              <a:rPr lang="en-US" sz="1600" dirty="0">
+                <a:solidFill>
+                  <a:schemeClr val="tx1"/>
+                </a:solidFill>
+              </a:rPr>
+              <a:t> </a:t>
+            </a:r>
+            <a:br>
+              <a:rPr lang="en-US" dirty="0">
+                <a:solidFill>
+                  <a:schemeClr val="tx1"/>
+                </a:solidFill>
+              </a:rPr>
+            </a:br>
+            <a:endParaRPr lang="pl-PL" dirty="0">
+              <a:solidFill>
+                <a:schemeClr val="tx1"/>
+              </a:solidFill>
+            </a:endParaRPr>
+          </a:p>
+        </p:txBody>
+      </p:sp>
+    </p:spTree>
+    <p:extLst>
+      <p:ext uri="{BB962C8B-B14F-4D97-AF65-F5344CB8AC3E}">
+        <p14:creationId xmlns:p14="http://schemas.microsoft.com/office/powerpoint/2010/main" val="2236679113"/>
+      </p:ext>
+    </p:extLst>
+  </p:cSld>
+  <p:clrMapOvr>
+    <a:masterClrMapping/>
+  </p:clrMapOvr>
+</p:sld>
+</file>
+
+<file path=ppt/slides/slide7.xml><?xml version="1.0" encoding="utf-8"?>
+<p:sld xmlns:a="http://schemas.openxmlformats.org/drawingml/2006/main" xmlns:r="http://schemas.openxmlformats.org/officeDocument/2006/relationships" xmlns:p="http://schemas.openxmlformats.org/presentationml/2006/main">
+  <p:cSld>
+    <p:bg>
+      <p:bgPr>
+        <a:blipFill dpi="0" rotWithShape="0">
+          <a:blip r:embed="rId3" cstate="print"/>
+          <a:srcRect/>
+          <a:stretch>
+            <a:fillRect/>
+          </a:stretch>
+        </a:blipFill>
+        <a:effectLst/>
+      </p:bgPr>
+    </p:bg>
+    <p:spTree>
+      <p:nvGrpSpPr>
+        <p:cNvPr id="1" name=""/>
+        <p:cNvGrpSpPr/>
+        <p:nvPr/>
+      </p:nvGrpSpPr>
+      <p:grpSpPr>
+        <a:xfrm>
+          <a:off x="0" y="0"/>
+          <a:ext cx="0" cy="0"/>
+          <a:chOff x="0" y="0"/>
+          <a:chExt cx="0" cy="0"/>
+        </a:xfrm>
+      </p:grpSpPr>
+      <p:sp>
+        <p:nvSpPr>
+          <p:cNvPr id="2" name="Rectangle 1"/>
+          <p:cNvSpPr/>
+          <p:nvPr/>
+        </p:nvSpPr>
+        <p:spPr>
+          <a:xfrm>
+            <a:off x="1979712" y="188640"/>
+            <a:ext cx="6696744" cy="492443"/>
+          </a:xfrm>
+          <a:prstGeom prst="rect">
+            <a:avLst/>
+          </a:prstGeom>
+        </p:spPr>
+        <p:txBody>
+          <a:bodyPr wrap="square">
+            <a:spAutoFit/>
+          </a:bodyPr>
+          <a:lstStyle/>
+          <a:p>
+            <a:pPr algn="ctr"/>
+            <a:r>
+              <a:rPr lang="pl-PL" sz="2600" dirty="0">
+                <a:solidFill>
+                  <a:schemeClr val="bg1"/>
+                </a:solidFill>
+                <a:latin typeface="Verdana" panose="020B0604030504040204" pitchFamily="34" charset="0"/>
+                <a:ea typeface="Verdana" panose="020B0604030504040204" pitchFamily="34" charset="0"/>
+                <a:cs typeface="Verdana" panose="020B0604030504040204" pitchFamily="34" charset="0"/>
+              </a:rPr>
               <a:t>JVM, JRE, JDK</a:t>
             </a:r>
           </a:p>
@@ -8922,7 +9374,7 @@
 </p:sld>
 </file>
 
-<file path=ppt/slides/slide7.xml><?xml version="1.0" encoding="utf-8"?>
+<file path=ppt/slides/slide8.xml><?xml version="1.0" encoding="utf-8"?>
 <p:sld xmlns:a="http://schemas.openxmlformats.org/drawingml/2006/main" xmlns:r="http://schemas.openxmlformats.org/officeDocument/2006/relationships" xmlns:p="http://schemas.openxmlformats.org/presentationml/2006/main">
   <p:cSld>
     <p:bg>
@@ -9047,7 +9499,7 @@
 </p:sld>
 </file>
 
-<file path=ppt/slides/slide8.xml><?xml version="1.0" encoding="utf-8"?>
+<file path=ppt/slides/slide9.xml><?xml version="1.0" encoding="utf-8"?>
 <p:sld xmlns:a="http://schemas.openxmlformats.org/drawingml/2006/main" xmlns:r="http://schemas.openxmlformats.org/officeDocument/2006/relationships" xmlns:p="http://schemas.openxmlformats.org/presentationml/2006/main">
   <p:cSld>
     <p:bg>
@@ -9292,126 +9744,6 @@
     <p:extLst>
       <p:ext uri="{BB962C8B-B14F-4D97-AF65-F5344CB8AC3E}">
         <p14:creationId xmlns:p14="http://schemas.microsoft.com/office/powerpoint/2010/main" val="1085902210"/>
-      </p:ext>
-    </p:extLst>
-  </p:cSld>
-  <p:clrMapOvr>
-    <a:masterClrMapping/>
-  </p:clrMapOvr>
-</p:sld>
-</file>
-
-<file path=ppt/slides/slide9.xml><?xml version="1.0" encoding="utf-8"?>
-<p:sld xmlns:a="http://schemas.openxmlformats.org/drawingml/2006/main" xmlns:r="http://schemas.openxmlformats.org/officeDocument/2006/relationships" xmlns:p="http://schemas.openxmlformats.org/presentationml/2006/main">
-  <p:cSld>
-    <p:bg>
-      <p:bgPr>
-        <a:blipFill dpi="0" rotWithShape="0">
-          <a:blip r:embed="rId3" cstate="print"/>
-          <a:srcRect/>
-          <a:stretch>
-            <a:fillRect/>
-          </a:stretch>
-        </a:blipFill>
-        <a:effectLst/>
-      </p:bgPr>
-    </p:bg>
-    <p:spTree>
-      <p:nvGrpSpPr>
-        <p:cNvPr id="1" name="">
-          <a:extLst>
-            <a:ext uri="{FF2B5EF4-FFF2-40B4-BE49-F238E27FC236}">
-              <a16:creationId xmlns:a16="http://schemas.microsoft.com/office/drawing/2014/main" id="{3EC85931-5F30-6DF4-9AC0-B9F68F197850}"/>
-            </a:ext>
-          </a:extLst>
-        </p:cNvPr>
-        <p:cNvGrpSpPr/>
-        <p:nvPr/>
-      </p:nvGrpSpPr>
-      <p:grpSpPr>
-        <a:xfrm>
-          <a:off x="0" y="0"/>
-          <a:ext cx="0" cy="0"/>
-          <a:chOff x="0" y="0"/>
-          <a:chExt cx="0" cy="0"/>
-        </a:xfrm>
-      </p:grpSpPr>
-      <p:sp>
-        <p:nvSpPr>
-          <p:cNvPr id="2" name="Rectangle 1">
-            <a:extLst>
-              <a:ext uri="{FF2B5EF4-FFF2-40B4-BE49-F238E27FC236}">
-                <a16:creationId xmlns:a16="http://schemas.microsoft.com/office/drawing/2014/main" id="{F9C57104-BFC8-496F-3C4F-1B6AF0602AB1}"/>
-              </a:ext>
-            </a:extLst>
-          </p:cNvPr>
-          <p:cNvSpPr/>
-          <p:nvPr/>
-        </p:nvSpPr>
-        <p:spPr>
-          <a:xfrm>
-            <a:off x="1979712" y="188640"/>
-            <a:ext cx="6696744" cy="492443"/>
-          </a:xfrm>
-          <a:prstGeom prst="rect">
-            <a:avLst/>
-          </a:prstGeom>
-        </p:spPr>
-        <p:txBody>
-          <a:bodyPr wrap="square">
-            <a:spAutoFit/>
-          </a:bodyPr>
-          <a:lstStyle/>
-          <a:p>
-            <a:pPr algn="ctr"/>
-            <a:r>
-              <a:rPr lang="pl-PL" sz="2600" dirty="0">
-                <a:solidFill>
-                  <a:schemeClr val="bg1"/>
-                </a:solidFill>
-                <a:latin typeface="Verdana" panose="020B0604030504040204" pitchFamily="34" charset="0"/>
-                <a:ea typeface="Verdana" panose="020B0604030504040204" pitchFamily="34" charset="0"/>
-                <a:cs typeface="Verdana" panose="020B0604030504040204" pitchFamily="34" charset="0"/>
-              </a:rPr>
-              <a:t>Kotlin</a:t>
-            </a:r>
-          </a:p>
-        </p:txBody>
-      </p:sp>
-      <p:pic>
-        <p:nvPicPr>
-          <p:cNvPr id="5" name="Obraz 4">
-            <a:extLst>
-              <a:ext uri="{FF2B5EF4-FFF2-40B4-BE49-F238E27FC236}">
-                <a16:creationId xmlns:a16="http://schemas.microsoft.com/office/drawing/2014/main" id="{D6543BEF-795C-B45A-FDE5-C65D8230F28E}"/>
-              </a:ext>
-            </a:extLst>
-          </p:cNvPr>
-          <p:cNvPicPr>
-            <a:picLocks noChangeAspect="1"/>
-          </p:cNvPicPr>
-          <p:nvPr/>
-        </p:nvPicPr>
-        <p:blipFill>
-          <a:blip r:embed="rId4"/>
-          <a:stretch>
-            <a:fillRect/>
-          </a:stretch>
-        </p:blipFill>
-        <p:spPr>
-          <a:xfrm>
-            <a:off x="1043608" y="847281"/>
-            <a:ext cx="5064993" cy="3849666"/>
-          </a:xfrm>
-          <a:prstGeom prst="rect">
-            <a:avLst/>
-          </a:prstGeom>
-        </p:spPr>
-      </p:pic>
-    </p:spTree>
-    <p:extLst>
-      <p:ext uri="{BB962C8B-B14F-4D97-AF65-F5344CB8AC3E}">
-        <p14:creationId xmlns:p14="http://schemas.microsoft.com/office/powerpoint/2010/main" val="1081900127"/>
       </p:ext>
     </p:extLst>
   </p:cSld>
